--- a/output/wordlabs-ise-suffix-3day.pptx
+++ b/output/wordlabs-ise-suffix-3day.pptx
@@ -6040,7 +6040,7 @@
                 <a:ea typeface="Calibri" pitchFamily="34" charset="-122"/>
                 <a:cs typeface="Calibri" pitchFamily="34" charset="-120"/>
               </a:rPr>
-              <a:t>We need to </a:t>
+              <a:t>She had to </a:t>
             </a:r>
             <a:pPr algn="l" indent="0" marL="0">
               <a:buNone/>
@@ -6057,7 +6057,7 @@
                 <a:ea typeface="Calibri" pitchFamily="34" charset="-122"/>
                 <a:cs typeface="Calibri" pitchFamily="34" charset="-120"/>
               </a:rPr>
-              <a:t>organise</a:t>
+              <a:t>memorise</a:t>
             </a:r>
             <a:pPr algn="l" indent="0" marL="0">
               <a:buNone/>
@@ -6071,7 +6071,7 @@
                 <a:ea typeface="Calibri" pitchFamily="34" charset="-122"/>
                 <a:cs typeface="Calibri" pitchFamily="34" charset="-120"/>
               </a:rPr>
-              <a:t> our project and </a:t>
+              <a:t> the speech and then </a:t>
             </a:r>
             <a:pPr algn="l" indent="0" marL="0">
               <a:buNone/>
@@ -6102,7 +6102,7 @@
                 <a:ea typeface="Calibri" pitchFamily="34" charset="-122"/>
                 <a:cs typeface="Calibri" pitchFamily="34" charset="-120"/>
               </a:rPr>
-              <a:t> it to the rest of the school.</a:t>
+              <a:t> the school play.</a:t>
             </a:r>
             <a:endParaRPr lang="en-US" sz="1800" dirty="0"/>
           </a:p>
@@ -6257,7 +6257,7 @@
                 <a:ea typeface="Trebuchet MS" pitchFamily="34" charset="-122"/>
                 <a:cs typeface="Trebuchet MS" pitchFamily="34" charset="-120"/>
               </a:rPr>
-              <a:t>organise</a:t>
+              <a:t>memorise</a:t>
             </a:r>
             <a:endParaRPr lang="en-US" sz="1400" dirty="0"/>
           </a:p>
@@ -6855,7 +6855,7 @@
                 <a:ea typeface="Trebuchet MS" pitchFamily="34" charset="-122"/>
                 <a:cs typeface="Trebuchet MS" pitchFamily="34" charset="-120"/>
               </a:rPr>
-              <a:t>organise</a:t>
+              <a:t>memorise</a:t>
             </a:r>
             <a:endParaRPr lang="en-US" sz="2800" dirty="0"/>
           </a:p>
@@ -7682,7 +7682,7 @@
                 <a:ea typeface="Trebuchet MS" pitchFamily="34" charset="-122"/>
                 <a:cs typeface="Trebuchet MS" pitchFamily="34" charset="-120"/>
               </a:rPr>
-              <a:t>organise</a:t>
+              <a:t>memorise</a:t>
             </a:r>
             <a:endParaRPr lang="en-US" sz="2800" dirty="0"/>
           </a:p>
@@ -7821,7 +7821,7 @@
                 <a:ea typeface="Trebuchet MS" pitchFamily="34" charset="-122"/>
                 <a:cs typeface="Trebuchet MS" pitchFamily="34" charset="-120"/>
               </a:rPr>
-              <a:t>organ</a:t>
+              <a:t>memor</a:t>
             </a:r>
             <a:endParaRPr lang="en-US" sz="1300" dirty="0"/>
           </a:p>
@@ -7860,7 +7860,7 @@
                 <a:ea typeface="Calibri" pitchFamily="34" charset="-122"/>
                 <a:cs typeface="Calibri" pitchFamily="34" charset="-120"/>
               </a:rPr>
-              <a:t>instrument, tool, body part</a:t>
+              <a:t>memory, mindful</a:t>
             </a:r>
             <a:endParaRPr lang="en-US" sz="850" dirty="0"/>
           </a:p>
@@ -8667,7 +8667,7 @@
                 <a:ea typeface="Trebuchet MS" pitchFamily="34" charset="-122"/>
                 <a:cs typeface="Trebuchet MS" pitchFamily="34" charset="-120"/>
               </a:rPr>
-              <a:t>organise</a:t>
+              <a:t>memorise</a:t>
             </a:r>
             <a:endParaRPr lang="en-US" sz="2800" dirty="0"/>
           </a:p>
@@ -8806,7 +8806,7 @@
                 <a:ea typeface="Trebuchet MS" pitchFamily="34" charset="-122"/>
                 <a:cs typeface="Trebuchet MS" pitchFamily="34" charset="-120"/>
               </a:rPr>
-              <a:t>organ</a:t>
+              <a:t>memor</a:t>
             </a:r>
             <a:endParaRPr lang="en-US" sz="1300" dirty="0"/>
           </a:p>
@@ -8845,7 +8845,7 @@
                 <a:ea typeface="Calibri" pitchFamily="34" charset="-122"/>
                 <a:cs typeface="Calibri" pitchFamily="34" charset="-120"/>
               </a:rPr>
-              <a:t>instrument, tool, body part</a:t>
+              <a:t>memory, mindful</a:t>
             </a:r>
             <a:endParaRPr lang="en-US" sz="850" dirty="0"/>
           </a:p>
@@ -9116,7 +9116,7 @@
                 <a:ea typeface="Trebuchet MS" pitchFamily="34" charset="-122"/>
                 <a:cs typeface="Trebuchet MS" pitchFamily="34" charset="-120"/>
               </a:rPr>
-              <a:t>or</a:t>
+              <a:t>mem</a:t>
             </a:r>
             <a:endParaRPr lang="en-US" sz="1400" dirty="0"/>
           </a:p>
@@ -9221,7 +9221,7 @@
                 <a:ea typeface="Trebuchet MS" pitchFamily="34" charset="-122"/>
                 <a:cs typeface="Trebuchet MS" pitchFamily="34" charset="-120"/>
               </a:rPr>
-              <a:t>gan</a:t>
+              <a:t>or</a:t>
             </a:r>
             <a:endParaRPr lang="en-US" sz="1400" dirty="0"/>
           </a:p>
@@ -9889,7 +9889,7 @@
                 <a:ea typeface="Trebuchet MS" pitchFamily="34" charset="-122"/>
                 <a:cs typeface="Trebuchet MS" pitchFamily="34" charset="-120"/>
               </a:rPr>
-              <a:t>organise</a:t>
+              <a:t>memorise</a:t>
             </a:r>
             <a:endParaRPr lang="en-US" sz="2800" dirty="0"/>
           </a:p>
@@ -10028,7 +10028,7 @@
                 <a:ea typeface="Trebuchet MS" pitchFamily="34" charset="-122"/>
                 <a:cs typeface="Trebuchet MS" pitchFamily="34" charset="-120"/>
               </a:rPr>
-              <a:t>organ</a:t>
+              <a:t>memor</a:t>
             </a:r>
             <a:endParaRPr lang="en-US" sz="1300" dirty="0"/>
           </a:p>
@@ -10067,7 +10067,7 @@
                 <a:ea typeface="Calibri" pitchFamily="34" charset="-122"/>
                 <a:cs typeface="Calibri" pitchFamily="34" charset="-120"/>
               </a:rPr>
-              <a:t>instrument, tool, body part</a:t>
+              <a:t>memory, mindful</a:t>
             </a:r>
             <a:endParaRPr lang="en-US" sz="850" dirty="0"/>
           </a:p>
@@ -10338,7 +10338,7 @@
                 <a:ea typeface="Trebuchet MS" pitchFamily="34" charset="-122"/>
                 <a:cs typeface="Trebuchet MS" pitchFamily="34" charset="-120"/>
               </a:rPr>
-              <a:t>or</a:t>
+              <a:t>mem</a:t>
             </a:r>
             <a:endParaRPr lang="en-US" sz="1400" dirty="0"/>
           </a:p>
@@ -10443,7 +10443,7 @@
                 <a:ea typeface="Trebuchet MS" pitchFamily="34" charset="-122"/>
                 <a:cs typeface="Trebuchet MS" pitchFamily="34" charset="-120"/>
               </a:rPr>
-              <a:t>gan</a:t>
+              <a:t>or</a:t>
             </a:r>
             <a:endParaRPr lang="en-US" sz="1400" dirty="0"/>
           </a:p>
@@ -10655,7 +10655,7 @@
         </p:nvSpPr>
         <p:spPr>
           <a:xfrm>
-            <a:off x="2427732" y="4169664"/>
+            <a:off x="2254649" y="4169664"/>
             <a:ext cx="685800" cy="384048"/>
           </a:xfrm>
           <a:prstGeom prst="rect">
@@ -10682,7 +10682,7 @@
         </p:nvSpPr>
         <p:spPr>
           <a:xfrm>
-            <a:off x="2427732" y="4169664"/>
+            <a:off x="2254649" y="4169664"/>
             <a:ext cx="685800" cy="384048"/>
           </a:xfrm>
           <a:prstGeom prst="rect">
@@ -10707,7 +10707,7 @@
                 <a:ea typeface="Trebuchet MS" pitchFamily="34" charset="-122"/>
                 <a:cs typeface="Trebuchet MS" pitchFamily="34" charset="-120"/>
               </a:rPr>
-              <a:t>or</a:t>
+              <a:t>m</a:t>
             </a:r>
             <a:endParaRPr lang="en-US" sz="900" dirty="0"/>
           </a:p>
@@ -10721,7 +10721,7 @@
         </p:nvSpPr>
         <p:spPr>
           <a:xfrm>
-            <a:off x="3639312" y="4169664"/>
+            <a:off x="3293146" y="4169664"/>
             <a:ext cx="685800" cy="384048"/>
           </a:xfrm>
           <a:prstGeom prst="rect">
@@ -10748,7 +10748,7 @@
         </p:nvSpPr>
         <p:spPr>
           <a:xfrm>
-            <a:off x="3639312" y="4169664"/>
+            <a:off x="3293146" y="4169664"/>
             <a:ext cx="685800" cy="384048"/>
           </a:xfrm>
           <a:prstGeom prst="rect">
@@ -10773,7 +10773,7 @@
                 <a:ea typeface="Trebuchet MS" pitchFamily="34" charset="-122"/>
                 <a:cs typeface="Trebuchet MS" pitchFamily="34" charset="-120"/>
               </a:rPr>
-              <a:t>g</a:t>
+              <a:t>e</a:t>
             </a:r>
             <a:endParaRPr lang="en-US" sz="900" dirty="0"/>
           </a:p>
@@ -10787,7 +10787,7 @@
         </p:nvSpPr>
         <p:spPr>
           <a:xfrm>
-            <a:off x="4850892" y="4169664"/>
+            <a:off x="4331643" y="4169664"/>
             <a:ext cx="685800" cy="384048"/>
           </a:xfrm>
           <a:prstGeom prst="rect">
@@ -10814,7 +10814,7 @@
         </p:nvSpPr>
         <p:spPr>
           <a:xfrm>
-            <a:off x="4850892" y="4169664"/>
+            <a:off x="4331643" y="4169664"/>
             <a:ext cx="685800" cy="384048"/>
           </a:xfrm>
           <a:prstGeom prst="rect">
@@ -10839,7 +10839,7 @@
                 <a:ea typeface="Trebuchet MS" pitchFamily="34" charset="-122"/>
                 <a:cs typeface="Trebuchet MS" pitchFamily="34" charset="-120"/>
               </a:rPr>
-              <a:t>a</a:t>
+              <a:t>m</a:t>
             </a:r>
             <a:endParaRPr lang="en-US" sz="900" dirty="0"/>
           </a:p>
@@ -10853,7 +10853,7 @@
         </p:nvSpPr>
         <p:spPr>
           <a:xfrm>
-            <a:off x="6062472" y="4169664"/>
+            <a:off x="5370141" y="4169664"/>
             <a:ext cx="685800" cy="384048"/>
           </a:xfrm>
           <a:prstGeom prst="rect">
@@ -10880,7 +10880,7 @@
         </p:nvSpPr>
         <p:spPr>
           <a:xfrm>
-            <a:off x="6062472" y="4169664"/>
+            <a:off x="5370141" y="4169664"/>
             <a:ext cx="685800" cy="384048"/>
           </a:xfrm>
           <a:prstGeom prst="rect">
@@ -10905,7 +10905,7 @@
                 <a:ea typeface="Trebuchet MS" pitchFamily="34" charset="-122"/>
                 <a:cs typeface="Trebuchet MS" pitchFamily="34" charset="-120"/>
               </a:rPr>
-              <a:t>n</a:t>
+              <a:t>or</a:t>
             </a:r>
             <a:endParaRPr lang="en-US" sz="900" dirty="0"/>
           </a:p>
@@ -10919,7 +10919,7 @@
         </p:nvSpPr>
         <p:spPr>
           <a:xfrm>
-            <a:off x="7274052" y="4169664"/>
+            <a:off x="6408638" y="4169664"/>
             <a:ext cx="685800" cy="384048"/>
           </a:xfrm>
           <a:prstGeom prst="rect">
@@ -10946,7 +10946,7 @@
         </p:nvSpPr>
         <p:spPr>
           <a:xfrm>
-            <a:off x="7274052" y="4169664"/>
+            <a:off x="6408638" y="4169664"/>
             <a:ext cx="685800" cy="384048"/>
           </a:xfrm>
           <a:prstGeom prst="rect">
@@ -10971,7 +10971,7 @@
                 <a:ea typeface="Trebuchet MS" pitchFamily="34" charset="-122"/>
                 <a:cs typeface="Trebuchet MS" pitchFamily="34" charset="-120"/>
               </a:rPr>
-              <a:t>ise</a:t>
+              <a:t>i</a:t>
             </a:r>
             <a:endParaRPr lang="en-US" sz="900" dirty="0"/>
           </a:p>
@@ -10979,13 +10979,79 @@
       </p:sp>
       <p:sp>
         <p:nvSpPr>
-          <p:cNvPr id="46" name="Text 44"/>
-          <p:cNvSpPr/>
-          <p:nvPr/>
-        </p:nvSpPr>
-        <p:spPr>
-          <a:xfrm>
-            <a:off x="7274052" y="4572000"/>
+          <p:cNvPr id="46" name="Shape 44"/>
+          <p:cNvSpPr/>
+          <p:nvPr/>
+        </p:nvSpPr>
+        <p:spPr>
+          <a:xfrm>
+            <a:off x="7447135" y="4169664"/>
+            <a:ext cx="685800" cy="384048"/>
+          </a:xfrm>
+          <a:prstGeom prst="rect">
+            <a:avLst>
+              <a:gd name="adj" fmla="val 9524"/>
+            </a:avLst>
+          </a:prstGeom>
+          <a:solidFill>
+            <a:srgbClr val="FFFFFF"/>
+          </a:solidFill>
+          <a:ln w="12700">
+            <a:solidFill>
+              <a:srgbClr val="DB2777"/>
+            </a:solidFill>
+            <a:prstDash val="solid"/>
+          </a:ln>
+        </p:spPr>
+      </p:sp>
+      <p:sp>
+        <p:nvSpPr>
+          <p:cNvPr id="47" name="Text 45"/>
+          <p:cNvSpPr/>
+          <p:nvPr/>
+        </p:nvSpPr>
+        <p:spPr>
+          <a:xfrm>
+            <a:off x="7447135" y="4169664"/>
+            <a:ext cx="685800" cy="384048"/>
+          </a:xfrm>
+          <a:prstGeom prst="rect">
+            <a:avLst/>
+          </a:prstGeom>
+          <a:noFill/>
+          <a:ln/>
+        </p:spPr>
+        <p:txBody>
+          <a:bodyPr wrap="square" lIns="0" tIns="0" rIns="0" bIns="0" rtlCol="0" anchor="ctr"/>
+          <a:lstStyle/>
+          <a:p>
+            <a:pPr algn="ctr" indent="0" marL="0">
+              <a:buNone/>
+            </a:pPr>
+            <a:r>
+              <a:rPr lang="en-US" sz="900" b="1" dirty="0">
+                <a:solidFill>
+                  <a:srgbClr val="9D174D"/>
+                </a:solidFill>
+                <a:latin typeface="Trebuchet MS" pitchFamily="34" charset="0"/>
+                <a:ea typeface="Trebuchet MS" pitchFamily="34" charset="-122"/>
+                <a:cs typeface="Trebuchet MS" pitchFamily="34" charset="-120"/>
+              </a:rPr>
+              <a:t>se</a:t>
+            </a:r>
+            <a:endParaRPr lang="en-US" sz="900" dirty="0"/>
+          </a:p>
+        </p:txBody>
+      </p:sp>
+      <p:sp>
+        <p:nvSpPr>
+          <p:cNvPr id="48" name="Text 46"/>
+          <p:cNvSpPr/>
+          <p:nvPr/>
+        </p:nvSpPr>
+        <p:spPr>
+          <a:xfrm>
+            <a:off x="7447135" y="4572000"/>
             <a:ext cx="685800" cy="219456"/>
           </a:xfrm>
           <a:prstGeom prst="rect">
@@ -11010,7 +11076,7 @@
                 <a:ea typeface="Calibri" pitchFamily="34" charset="-122"/>
                 <a:cs typeface="Calibri" pitchFamily="34" charset="-120"/>
               </a:rPr>
-              <a:t>/ize/</a:t>
+              <a:t>/z/</a:t>
             </a:r>
             <a:endParaRPr lang="en-US" sz="750" dirty="0"/>
           </a:p>
@@ -15842,7 +15908,7 @@
         </p:nvSpPr>
         <p:spPr>
           <a:xfrm>
-            <a:off x="2254649" y="4169664"/>
+            <a:off x="2124837" y="4169664"/>
             <a:ext cx="685800" cy="384048"/>
           </a:xfrm>
           <a:prstGeom prst="rect">
@@ -15869,7 +15935,7 @@
         </p:nvSpPr>
         <p:spPr>
           <a:xfrm>
-            <a:off x="2254649" y="4169664"/>
+            <a:off x="2124837" y="4169664"/>
             <a:ext cx="685800" cy="384048"/>
           </a:xfrm>
           <a:prstGeom prst="rect">
@@ -15908,7 +15974,7 @@
         </p:nvSpPr>
         <p:spPr>
           <a:xfrm>
-            <a:off x="3293146" y="4169664"/>
+            <a:off x="3033522" y="4169664"/>
             <a:ext cx="685800" cy="384048"/>
           </a:xfrm>
           <a:prstGeom prst="rect">
@@ -15935,7 +16001,7 @@
         </p:nvSpPr>
         <p:spPr>
           <a:xfrm>
-            <a:off x="3293146" y="4169664"/>
+            <a:off x="3033522" y="4169664"/>
             <a:ext cx="685800" cy="384048"/>
           </a:xfrm>
           <a:prstGeom prst="rect">
@@ -15974,7 +16040,7 @@
         </p:nvSpPr>
         <p:spPr>
           <a:xfrm>
-            <a:off x="4331643" y="4169664"/>
+            <a:off x="3942207" y="4169664"/>
             <a:ext cx="685800" cy="384048"/>
           </a:xfrm>
           <a:prstGeom prst="rect">
@@ -16001,7 +16067,7 @@
         </p:nvSpPr>
         <p:spPr>
           <a:xfrm>
-            <a:off x="4331643" y="4169664"/>
+            <a:off x="3942207" y="4169664"/>
             <a:ext cx="685800" cy="384048"/>
           </a:xfrm>
           <a:prstGeom prst="rect">
@@ -16040,7 +16106,7 @@
         </p:nvSpPr>
         <p:spPr>
           <a:xfrm>
-            <a:off x="5370141" y="4169664"/>
+            <a:off x="4850892" y="4169664"/>
             <a:ext cx="685800" cy="384048"/>
           </a:xfrm>
           <a:prstGeom prst="rect">
@@ -16067,7 +16133,7 @@
         </p:nvSpPr>
         <p:spPr>
           <a:xfrm>
-            <a:off x="5370141" y="4169664"/>
+            <a:off x="4850892" y="4169664"/>
             <a:ext cx="685800" cy="384048"/>
           </a:xfrm>
           <a:prstGeom prst="rect">
@@ -16106,7 +16172,7 @@
         </p:nvSpPr>
         <p:spPr>
           <a:xfrm>
-            <a:off x="6408638" y="4169664"/>
+            <a:off x="5759577" y="4169664"/>
             <a:ext cx="685800" cy="384048"/>
           </a:xfrm>
           <a:prstGeom prst="rect">
@@ -16133,7 +16199,7 @@
         </p:nvSpPr>
         <p:spPr>
           <a:xfrm>
-            <a:off x="6408638" y="4169664"/>
+            <a:off x="5759577" y="4169664"/>
             <a:ext cx="685800" cy="384048"/>
           </a:xfrm>
           <a:prstGeom prst="rect">
@@ -16172,7 +16238,7 @@
         </p:nvSpPr>
         <p:spPr>
           <a:xfrm>
-            <a:off x="7447135" y="4169664"/>
+            <a:off x="6668262" y="4169664"/>
             <a:ext cx="685800" cy="384048"/>
           </a:xfrm>
           <a:prstGeom prst="rect">
@@ -16199,7 +16265,7 @@
         </p:nvSpPr>
         <p:spPr>
           <a:xfrm>
-            <a:off x="7447135" y="4169664"/>
+            <a:off x="6668262" y="4169664"/>
             <a:ext cx="685800" cy="384048"/>
           </a:xfrm>
           <a:prstGeom prst="rect">
@@ -16224,7 +16290,7 @@
                 <a:ea typeface="Trebuchet MS" pitchFamily="34" charset="-122"/>
                 <a:cs typeface="Trebuchet MS" pitchFamily="34" charset="-120"/>
               </a:rPr>
-              <a:t>ise</a:t>
+              <a:t>i</a:t>
             </a:r>
             <a:endParaRPr lang="en-US" sz="900" dirty="0"/>
           </a:p>
@@ -16232,13 +16298,79 @@
       </p:sp>
       <p:sp>
         <p:nvSpPr>
-          <p:cNvPr id="51" name="Text 49"/>
-          <p:cNvSpPr/>
-          <p:nvPr/>
-        </p:nvSpPr>
-        <p:spPr>
-          <a:xfrm>
-            <a:off x="7447135" y="4572000"/>
+          <p:cNvPr id="51" name="Shape 49"/>
+          <p:cNvSpPr/>
+          <p:nvPr/>
+        </p:nvSpPr>
+        <p:spPr>
+          <a:xfrm>
+            <a:off x="7576947" y="4169664"/>
+            <a:ext cx="685800" cy="384048"/>
+          </a:xfrm>
+          <a:prstGeom prst="rect">
+            <a:avLst>
+              <a:gd name="adj" fmla="val 9524"/>
+            </a:avLst>
+          </a:prstGeom>
+          <a:solidFill>
+            <a:srgbClr val="FFFFFF"/>
+          </a:solidFill>
+          <a:ln w="12700">
+            <a:solidFill>
+              <a:srgbClr val="DB2777"/>
+            </a:solidFill>
+            <a:prstDash val="solid"/>
+          </a:ln>
+        </p:spPr>
+      </p:sp>
+      <p:sp>
+        <p:nvSpPr>
+          <p:cNvPr id="52" name="Text 50"/>
+          <p:cNvSpPr/>
+          <p:nvPr/>
+        </p:nvSpPr>
+        <p:spPr>
+          <a:xfrm>
+            <a:off x="7576947" y="4169664"/>
+            <a:ext cx="685800" cy="384048"/>
+          </a:xfrm>
+          <a:prstGeom prst="rect">
+            <a:avLst/>
+          </a:prstGeom>
+          <a:noFill/>
+          <a:ln/>
+        </p:spPr>
+        <p:txBody>
+          <a:bodyPr wrap="square" lIns="0" tIns="0" rIns="0" bIns="0" rtlCol="0" anchor="ctr"/>
+          <a:lstStyle/>
+          <a:p>
+            <a:pPr algn="ctr" indent="0" marL="0">
+              <a:buNone/>
+            </a:pPr>
+            <a:r>
+              <a:rPr lang="en-US" sz="900" b="1" dirty="0">
+                <a:solidFill>
+                  <a:srgbClr val="9D174D"/>
+                </a:solidFill>
+                <a:latin typeface="Trebuchet MS" pitchFamily="34" charset="0"/>
+                <a:ea typeface="Trebuchet MS" pitchFamily="34" charset="-122"/>
+                <a:cs typeface="Trebuchet MS" pitchFamily="34" charset="-120"/>
+              </a:rPr>
+              <a:t>se</a:t>
+            </a:r>
+            <a:endParaRPr lang="en-US" sz="900" dirty="0"/>
+          </a:p>
+        </p:txBody>
+      </p:sp>
+      <p:sp>
+        <p:nvSpPr>
+          <p:cNvPr id="53" name="Text 51"/>
+          <p:cNvSpPr/>
+          <p:nvPr/>
+        </p:nvSpPr>
+        <p:spPr>
+          <a:xfrm>
+            <a:off x="7576947" y="4572000"/>
             <a:ext cx="685800" cy="219456"/>
           </a:xfrm>
           <a:prstGeom prst="rect">
@@ -16263,7 +16395,7 @@
                 <a:ea typeface="Calibri" pitchFamily="34" charset="-122"/>
                 <a:cs typeface="Calibri" pitchFamily="34" charset="-120"/>
               </a:rPr>
-              <a:t>/ize/</a:t>
+              <a:t>/z/</a:t>
             </a:r>
             <a:endParaRPr lang="en-US" sz="750" dirty="0"/>
           </a:p>
@@ -17171,7 +17303,7 @@
                 <a:ea typeface="Trebuchet MS" pitchFamily="34" charset="-122"/>
                 <a:cs typeface="Trebuchet MS" pitchFamily="34" charset="-120"/>
               </a:rPr>
-              <a:t>2</a:t>
+              <a:t>3</a:t>
             </a:r>
             <a:pPr algn="ctr" indent="0" marL="0">
               <a:buNone/>
@@ -17589,7 +17721,7 @@
                 <a:ea typeface="Calibri" pitchFamily="34" charset="-122"/>
                 <a:cs typeface="Calibri" pitchFamily="34" charset="-120"/>
               </a:rPr>
-              <a:t>After you </a:t>
+              <a:t>We should </a:t>
             </a:r>
             <a:pPr algn="l" indent="0" marL="0">
               <a:buNone/>
@@ -17606,7 +17738,7 @@
                 <a:ea typeface="Calibri" pitchFamily="34" charset="-122"/>
                 <a:cs typeface="Calibri" pitchFamily="34" charset="-120"/>
               </a:rPr>
-              <a:t>summarise</a:t>
+              <a:t>organise</a:t>
             </a:r>
             <a:pPr algn="l" indent="0" marL="0">
               <a:buNone/>
@@ -17620,7 +17752,7 @@
                 <a:ea typeface="Calibri" pitchFamily="34" charset="-122"/>
                 <a:cs typeface="Calibri" pitchFamily="34" charset="-120"/>
               </a:rPr>
-              <a:t> the chapter, try to </a:t>
+              <a:t> our notes, </a:t>
             </a:r>
             <a:pPr algn="l" indent="0" marL="0">
               <a:buNone/>
@@ -17637,7 +17769,7 @@
                 <a:ea typeface="Calibri" pitchFamily="34" charset="-122"/>
                 <a:cs typeface="Calibri" pitchFamily="34" charset="-120"/>
               </a:rPr>
-              <a:t>memorise</a:t>
+              <a:t>summarise</a:t>
             </a:r>
             <a:pPr algn="l" indent="0" marL="0">
               <a:buNone/>
@@ -17651,7 +17783,7 @@
                 <a:ea typeface="Calibri" pitchFamily="34" charset="-122"/>
                 <a:cs typeface="Calibri" pitchFamily="34" charset="-120"/>
               </a:rPr>
-              <a:t> the key words, and then </a:t>
+              <a:t> the key ideas, and then </a:t>
             </a:r>
             <a:pPr algn="l" indent="0" marL="0">
               <a:buNone/>
@@ -17668,7 +17800,7 @@
                 <a:ea typeface="Calibri" pitchFamily="34" charset="-122"/>
                 <a:cs typeface="Calibri" pitchFamily="34" charset="-120"/>
               </a:rPr>
-              <a:t>apologise</a:t>
+              <a:t>realise</a:t>
             </a:r>
             <a:pPr algn="l" indent="0" marL="0">
               <a:buNone/>
@@ -17682,7 +17814,7 @@
                 <a:ea typeface="Calibri" pitchFamily="34" charset="-122"/>
                 <a:cs typeface="Calibri" pitchFamily="34" charset="-120"/>
               </a:rPr>
-              <a:t> to your partner for going first!</a:t>
+              <a:t> how much we have learned.</a:t>
             </a:r>
             <a:endParaRPr lang="en-US" sz="1800" dirty="0"/>
           </a:p>
@@ -17837,7 +17969,7 @@
                 <a:ea typeface="Trebuchet MS" pitchFamily="34" charset="-122"/>
                 <a:cs typeface="Trebuchet MS" pitchFamily="34" charset="-120"/>
               </a:rPr>
-              <a:t>summarise</a:t>
+              <a:t>organise</a:t>
             </a:r>
             <a:endParaRPr lang="en-US" sz="1400" dirty="0"/>
           </a:p>
@@ -17965,7 +18097,7 @@
                 <a:ea typeface="Trebuchet MS" pitchFamily="34" charset="-122"/>
                 <a:cs typeface="Trebuchet MS" pitchFamily="34" charset="-120"/>
               </a:rPr>
-              <a:t>memorise</a:t>
+              <a:t>summarise</a:t>
             </a:r>
             <a:endParaRPr lang="en-US" sz="1400" dirty="0"/>
           </a:p>
@@ -18093,7 +18225,7 @@
                 <a:ea typeface="Trebuchet MS" pitchFamily="34" charset="-122"/>
                 <a:cs typeface="Trebuchet MS" pitchFamily="34" charset="-120"/>
               </a:rPr>
-              <a:t>apologise</a:t>
+              <a:t>realise</a:t>
             </a:r>
             <a:endParaRPr lang="en-US" sz="1400" dirty="0"/>
           </a:p>
@@ -18563,7 +18695,7 @@
                 <a:ea typeface="Trebuchet MS" pitchFamily="34" charset="-122"/>
                 <a:cs typeface="Trebuchet MS" pitchFamily="34" charset="-120"/>
               </a:rPr>
-              <a:t>summarise</a:t>
+              <a:t>organise</a:t>
             </a:r>
             <a:endParaRPr lang="en-US" sz="2800" dirty="0"/>
           </a:p>
@@ -19390,7 +19522,7 @@
                 <a:ea typeface="Trebuchet MS" pitchFamily="34" charset="-122"/>
                 <a:cs typeface="Trebuchet MS" pitchFamily="34" charset="-120"/>
               </a:rPr>
-              <a:t>summarise</a:t>
+              <a:t>organise</a:t>
             </a:r>
             <a:endParaRPr lang="en-US" sz="2800" dirty="0"/>
           </a:p>
@@ -19529,7 +19661,7 @@
                 <a:ea typeface="Trebuchet MS" pitchFamily="34" charset="-122"/>
                 <a:cs typeface="Trebuchet MS" pitchFamily="34" charset="-120"/>
               </a:rPr>
-              <a:t>summar</a:t>
+              <a:t>organ</a:t>
             </a:r>
             <a:endParaRPr lang="en-US" sz="1300" dirty="0"/>
           </a:p>
@@ -19568,7 +19700,7 @@
                 <a:ea typeface="Calibri" pitchFamily="34" charset="-122"/>
                 <a:cs typeface="Calibri" pitchFamily="34" charset="-120"/>
               </a:rPr>
-              <a:t>sum, total, overview</a:t>
+              <a:t>tool, instrument, system</a:t>
             </a:r>
             <a:endParaRPr lang="en-US" sz="850" dirty="0"/>
           </a:p>
@@ -20375,7 +20507,7 @@
                 <a:ea typeface="Trebuchet MS" pitchFamily="34" charset="-122"/>
                 <a:cs typeface="Trebuchet MS" pitchFamily="34" charset="-120"/>
               </a:rPr>
-              <a:t>summarise</a:t>
+              <a:t>organise</a:t>
             </a:r>
             <a:endParaRPr lang="en-US" sz="2800" dirty="0"/>
           </a:p>
@@ -20514,7 +20646,7 @@
                 <a:ea typeface="Trebuchet MS" pitchFamily="34" charset="-122"/>
                 <a:cs typeface="Trebuchet MS" pitchFamily="34" charset="-120"/>
               </a:rPr>
-              <a:t>summar</a:t>
+              <a:t>organ</a:t>
             </a:r>
             <a:endParaRPr lang="en-US" sz="1300" dirty="0"/>
           </a:p>
@@ -20553,7 +20685,7 @@
                 <a:ea typeface="Calibri" pitchFamily="34" charset="-122"/>
                 <a:cs typeface="Calibri" pitchFamily="34" charset="-120"/>
               </a:rPr>
-              <a:t>sum, total, overview</a:t>
+              <a:t>tool, instrument, system</a:t>
             </a:r>
             <a:endParaRPr lang="en-US" sz="850" dirty="0"/>
           </a:p>
@@ -20824,7 +20956,7 @@
                 <a:ea typeface="Trebuchet MS" pitchFamily="34" charset="-122"/>
                 <a:cs typeface="Trebuchet MS" pitchFamily="34" charset="-120"/>
               </a:rPr>
-              <a:t>sum</a:t>
+              <a:t>or</a:t>
             </a:r>
             <a:endParaRPr lang="en-US" sz="1400" dirty="0"/>
           </a:p>
@@ -20929,7 +21061,7 @@
                 <a:ea typeface="Trebuchet MS" pitchFamily="34" charset="-122"/>
                 <a:cs typeface="Trebuchet MS" pitchFamily="34" charset="-120"/>
               </a:rPr>
-              <a:t>mar</a:t>
+              <a:t>gan</a:t>
             </a:r>
             <a:endParaRPr lang="en-US" sz="1400" dirty="0"/>
           </a:p>
@@ -21597,7 +21729,7 @@
                 <a:ea typeface="Trebuchet MS" pitchFamily="34" charset="-122"/>
                 <a:cs typeface="Trebuchet MS" pitchFamily="34" charset="-120"/>
               </a:rPr>
-              <a:t>summarise</a:t>
+              <a:t>organise</a:t>
             </a:r>
             <a:endParaRPr lang="en-US" sz="2800" dirty="0"/>
           </a:p>
@@ -21736,7 +21868,7 @@
                 <a:ea typeface="Trebuchet MS" pitchFamily="34" charset="-122"/>
                 <a:cs typeface="Trebuchet MS" pitchFamily="34" charset="-120"/>
               </a:rPr>
-              <a:t>summar</a:t>
+              <a:t>organ</a:t>
             </a:r>
             <a:endParaRPr lang="en-US" sz="1300" dirty="0"/>
           </a:p>
@@ -21775,7 +21907,7 @@
                 <a:ea typeface="Calibri" pitchFamily="34" charset="-122"/>
                 <a:cs typeface="Calibri" pitchFamily="34" charset="-120"/>
               </a:rPr>
-              <a:t>sum, total, overview</a:t>
+              <a:t>tool, instrument, system</a:t>
             </a:r>
             <a:endParaRPr lang="en-US" sz="850" dirty="0"/>
           </a:p>
@@ -22046,7 +22178,7 @@
                 <a:ea typeface="Trebuchet MS" pitchFamily="34" charset="-122"/>
                 <a:cs typeface="Trebuchet MS" pitchFamily="34" charset="-120"/>
               </a:rPr>
-              <a:t>sum</a:t>
+              <a:t>or</a:t>
             </a:r>
             <a:endParaRPr lang="en-US" sz="1400" dirty="0"/>
           </a:p>
@@ -22151,7 +22283,7 @@
                 <a:ea typeface="Trebuchet MS" pitchFamily="34" charset="-122"/>
                 <a:cs typeface="Trebuchet MS" pitchFamily="34" charset="-120"/>
               </a:rPr>
-              <a:t>mar</a:t>
+              <a:t>gan</a:t>
             </a:r>
             <a:endParaRPr lang="en-US" sz="1400" dirty="0"/>
           </a:p>
@@ -22363,7 +22495,7 @@
         </p:nvSpPr>
         <p:spPr>
           <a:xfrm>
-            <a:off x="2427732" y="4169664"/>
+            <a:off x="2254649" y="4169664"/>
             <a:ext cx="685800" cy="384048"/>
           </a:xfrm>
           <a:prstGeom prst="rect">
@@ -22390,7 +22522,7 @@
         </p:nvSpPr>
         <p:spPr>
           <a:xfrm>
-            <a:off x="2427732" y="4169664"/>
+            <a:off x="2254649" y="4169664"/>
             <a:ext cx="685800" cy="384048"/>
           </a:xfrm>
           <a:prstGeom prst="rect">
@@ -22415,7 +22547,7 @@
                 <a:ea typeface="Trebuchet MS" pitchFamily="34" charset="-122"/>
                 <a:cs typeface="Trebuchet MS" pitchFamily="34" charset="-120"/>
               </a:rPr>
-              <a:t>s</a:t>
+              <a:t>or</a:t>
             </a:r>
             <a:endParaRPr lang="en-US" sz="900" dirty="0"/>
           </a:p>
@@ -22429,7 +22561,7 @@
         </p:nvSpPr>
         <p:spPr>
           <a:xfrm>
-            <a:off x="3639312" y="4169664"/>
+            <a:off x="3293146" y="4169664"/>
             <a:ext cx="685800" cy="384048"/>
           </a:xfrm>
           <a:prstGeom prst="rect">
@@ -22456,7 +22588,7 @@
         </p:nvSpPr>
         <p:spPr>
           <a:xfrm>
-            <a:off x="3639312" y="4169664"/>
+            <a:off x="3293146" y="4169664"/>
             <a:ext cx="685800" cy="384048"/>
           </a:xfrm>
           <a:prstGeom prst="rect">
@@ -22481,7 +22613,7 @@
                 <a:ea typeface="Trebuchet MS" pitchFamily="34" charset="-122"/>
                 <a:cs typeface="Trebuchet MS" pitchFamily="34" charset="-120"/>
               </a:rPr>
-              <a:t>u</a:t>
+              <a:t>g</a:t>
             </a:r>
             <a:endParaRPr lang="en-US" sz="900" dirty="0"/>
           </a:p>
@@ -22495,7 +22627,7 @@
         </p:nvSpPr>
         <p:spPr>
           <a:xfrm>
-            <a:off x="4850892" y="4169664"/>
+            <a:off x="4331643" y="4169664"/>
             <a:ext cx="685800" cy="384048"/>
           </a:xfrm>
           <a:prstGeom prst="rect">
@@ -22522,7 +22654,7 @@
         </p:nvSpPr>
         <p:spPr>
           <a:xfrm>
-            <a:off x="4850892" y="4169664"/>
+            <a:off x="4331643" y="4169664"/>
             <a:ext cx="685800" cy="384048"/>
           </a:xfrm>
           <a:prstGeom prst="rect">
@@ -22547,7 +22679,7 @@
                 <a:ea typeface="Trebuchet MS" pitchFamily="34" charset="-122"/>
                 <a:cs typeface="Trebuchet MS" pitchFamily="34" charset="-120"/>
               </a:rPr>
-              <a:t>mm</a:t>
+              <a:t>a</a:t>
             </a:r>
             <a:endParaRPr lang="en-US" sz="900" dirty="0"/>
           </a:p>
@@ -22561,7 +22693,7 @@
         </p:nvSpPr>
         <p:spPr>
           <a:xfrm>
-            <a:off x="6062472" y="4169664"/>
+            <a:off x="5370141" y="4169664"/>
             <a:ext cx="685800" cy="384048"/>
           </a:xfrm>
           <a:prstGeom prst="rect">
@@ -22588,7 +22720,7 @@
         </p:nvSpPr>
         <p:spPr>
           <a:xfrm>
-            <a:off x="6062472" y="4169664"/>
+            <a:off x="5370141" y="4169664"/>
             <a:ext cx="685800" cy="384048"/>
           </a:xfrm>
           <a:prstGeom prst="rect">
@@ -22613,7 +22745,7 @@
                 <a:ea typeface="Trebuchet MS" pitchFamily="34" charset="-122"/>
                 <a:cs typeface="Trebuchet MS" pitchFamily="34" charset="-120"/>
               </a:rPr>
-              <a:t>ar</a:t>
+              <a:t>n</a:t>
             </a:r>
             <a:endParaRPr lang="en-US" sz="900" dirty="0"/>
           </a:p>
@@ -22627,7 +22759,7 @@
         </p:nvSpPr>
         <p:spPr>
           <a:xfrm>
-            <a:off x="7274052" y="4169664"/>
+            <a:off x="6408638" y="4169664"/>
             <a:ext cx="685800" cy="384048"/>
           </a:xfrm>
           <a:prstGeom prst="rect">
@@ -22654,7 +22786,7 @@
         </p:nvSpPr>
         <p:spPr>
           <a:xfrm>
-            <a:off x="7274052" y="4169664"/>
+            <a:off x="6408638" y="4169664"/>
             <a:ext cx="685800" cy="384048"/>
           </a:xfrm>
           <a:prstGeom prst="rect">
@@ -22679,7 +22811,7 @@
                 <a:ea typeface="Trebuchet MS" pitchFamily="34" charset="-122"/>
                 <a:cs typeface="Trebuchet MS" pitchFamily="34" charset="-120"/>
               </a:rPr>
-              <a:t>ise</a:t>
+              <a:t>i</a:t>
             </a:r>
             <a:endParaRPr lang="en-US" sz="900" dirty="0"/>
           </a:p>
@@ -22687,13 +22819,79 @@
       </p:sp>
       <p:sp>
         <p:nvSpPr>
-          <p:cNvPr id="46" name="Text 44"/>
-          <p:cNvSpPr/>
-          <p:nvPr/>
-        </p:nvSpPr>
-        <p:spPr>
-          <a:xfrm>
-            <a:off x="7274052" y="4572000"/>
+          <p:cNvPr id="46" name="Shape 44"/>
+          <p:cNvSpPr/>
+          <p:nvPr/>
+        </p:nvSpPr>
+        <p:spPr>
+          <a:xfrm>
+            <a:off x="7447135" y="4169664"/>
+            <a:ext cx="685800" cy="384048"/>
+          </a:xfrm>
+          <a:prstGeom prst="rect">
+            <a:avLst>
+              <a:gd name="adj" fmla="val 9524"/>
+            </a:avLst>
+          </a:prstGeom>
+          <a:solidFill>
+            <a:srgbClr val="FFFFFF"/>
+          </a:solidFill>
+          <a:ln w="12700">
+            <a:solidFill>
+              <a:srgbClr val="DB2777"/>
+            </a:solidFill>
+            <a:prstDash val="solid"/>
+          </a:ln>
+        </p:spPr>
+      </p:sp>
+      <p:sp>
+        <p:nvSpPr>
+          <p:cNvPr id="47" name="Text 45"/>
+          <p:cNvSpPr/>
+          <p:nvPr/>
+        </p:nvSpPr>
+        <p:spPr>
+          <a:xfrm>
+            <a:off x="7447135" y="4169664"/>
+            <a:ext cx="685800" cy="384048"/>
+          </a:xfrm>
+          <a:prstGeom prst="rect">
+            <a:avLst/>
+          </a:prstGeom>
+          <a:noFill/>
+          <a:ln/>
+        </p:spPr>
+        <p:txBody>
+          <a:bodyPr wrap="square" lIns="0" tIns="0" rIns="0" bIns="0" rtlCol="0" anchor="ctr"/>
+          <a:lstStyle/>
+          <a:p>
+            <a:pPr algn="ctr" indent="0" marL="0">
+              <a:buNone/>
+            </a:pPr>
+            <a:r>
+              <a:rPr lang="en-US" sz="900" b="1" dirty="0">
+                <a:solidFill>
+                  <a:srgbClr val="9D174D"/>
+                </a:solidFill>
+                <a:latin typeface="Trebuchet MS" pitchFamily="34" charset="0"/>
+                <a:ea typeface="Trebuchet MS" pitchFamily="34" charset="-122"/>
+                <a:cs typeface="Trebuchet MS" pitchFamily="34" charset="-120"/>
+              </a:rPr>
+              <a:t>se</a:t>
+            </a:r>
+            <a:endParaRPr lang="en-US" sz="900" dirty="0"/>
+          </a:p>
+        </p:txBody>
+      </p:sp>
+      <p:sp>
+        <p:nvSpPr>
+          <p:cNvPr id="48" name="Text 46"/>
+          <p:cNvSpPr/>
+          <p:nvPr/>
+        </p:nvSpPr>
+        <p:spPr>
+          <a:xfrm>
+            <a:off x="7447135" y="4572000"/>
             <a:ext cx="685800" cy="219456"/>
           </a:xfrm>
           <a:prstGeom prst="rect">
@@ -22718,7 +22916,7 @@
                 <a:ea typeface="Calibri" pitchFamily="34" charset="-122"/>
                 <a:cs typeface="Calibri" pitchFamily="34" charset="-120"/>
               </a:rPr>
-              <a:t>/ize/</a:t>
+              <a:t>/z/</a:t>
             </a:r>
             <a:endParaRPr lang="en-US" sz="750" dirty="0"/>
           </a:p>
@@ -23149,7 +23347,7 @@
                 <a:ea typeface="Trebuchet MS" pitchFamily="34" charset="-122"/>
                 <a:cs typeface="Trebuchet MS" pitchFamily="34" charset="-120"/>
               </a:rPr>
-              <a:t>memorise</a:t>
+              <a:t>summarise</a:t>
             </a:r>
             <a:endParaRPr lang="en-US" sz="2800" dirty="0"/>
           </a:p>
@@ -23976,7 +24174,7 @@
                 <a:ea typeface="Trebuchet MS" pitchFamily="34" charset="-122"/>
                 <a:cs typeface="Trebuchet MS" pitchFamily="34" charset="-120"/>
               </a:rPr>
-              <a:t>memorise</a:t>
+              <a:t>summarise</a:t>
             </a:r>
             <a:endParaRPr lang="en-US" sz="2800" dirty="0"/>
           </a:p>
@@ -24115,7 +24313,7 @@
                 <a:ea typeface="Trebuchet MS" pitchFamily="34" charset="-122"/>
                 <a:cs typeface="Trebuchet MS" pitchFamily="34" charset="-120"/>
               </a:rPr>
-              <a:t>memor</a:t>
+              <a:t>summar</a:t>
             </a:r>
             <a:endParaRPr lang="en-US" sz="1300" dirty="0"/>
           </a:p>
@@ -24154,7 +24352,7 @@
                 <a:ea typeface="Calibri" pitchFamily="34" charset="-122"/>
                 <a:cs typeface="Calibri" pitchFamily="34" charset="-120"/>
               </a:rPr>
-              <a:t>memory, remember</a:t>
+              <a:t>sum, main points</a:t>
             </a:r>
             <a:endParaRPr lang="en-US" sz="850" dirty="0"/>
           </a:p>
@@ -25680,7 +25878,7 @@
                 <a:ea typeface="Trebuchet MS" pitchFamily="34" charset="-122"/>
                 <a:cs typeface="Trebuchet MS" pitchFamily="34" charset="-120"/>
               </a:rPr>
-              <a:t>memorise</a:t>
+              <a:t>summarise</a:t>
             </a:r>
             <a:endParaRPr lang="en-US" sz="2800" dirty="0"/>
           </a:p>
@@ -25819,7 +26017,7 @@
                 <a:ea typeface="Trebuchet MS" pitchFamily="34" charset="-122"/>
                 <a:cs typeface="Trebuchet MS" pitchFamily="34" charset="-120"/>
               </a:rPr>
-              <a:t>memor</a:t>
+              <a:t>summar</a:t>
             </a:r>
             <a:endParaRPr lang="en-US" sz="1300" dirty="0"/>
           </a:p>
@@ -25858,7 +26056,7 @@
                 <a:ea typeface="Calibri" pitchFamily="34" charset="-122"/>
                 <a:cs typeface="Calibri" pitchFamily="34" charset="-120"/>
               </a:rPr>
-              <a:t>memory, remember</a:t>
+              <a:t>sum, main points</a:t>
             </a:r>
             <a:endParaRPr lang="en-US" sz="850" dirty="0"/>
           </a:p>
@@ -26129,7 +26327,7 @@
                 <a:ea typeface="Trebuchet MS" pitchFamily="34" charset="-122"/>
                 <a:cs typeface="Trebuchet MS" pitchFamily="34" charset="-120"/>
               </a:rPr>
-              <a:t>mem</a:t>
+              <a:t>sum</a:t>
             </a:r>
             <a:endParaRPr lang="en-US" sz="1400" dirty="0"/>
           </a:p>
@@ -26234,7 +26432,7 @@
                 <a:ea typeface="Trebuchet MS" pitchFamily="34" charset="-122"/>
                 <a:cs typeface="Trebuchet MS" pitchFamily="34" charset="-120"/>
               </a:rPr>
-              <a:t>or</a:t>
+              <a:t>mar</a:t>
             </a:r>
             <a:endParaRPr lang="en-US" sz="1400" dirty="0"/>
           </a:p>
@@ -26902,7 +27100,7 @@
                 <a:ea typeface="Trebuchet MS" pitchFamily="34" charset="-122"/>
                 <a:cs typeface="Trebuchet MS" pitchFamily="34" charset="-120"/>
               </a:rPr>
-              <a:t>memorise</a:t>
+              <a:t>summarise</a:t>
             </a:r>
             <a:endParaRPr lang="en-US" sz="2800" dirty="0"/>
           </a:p>
@@ -27041,7 +27239,7 @@
                 <a:ea typeface="Trebuchet MS" pitchFamily="34" charset="-122"/>
                 <a:cs typeface="Trebuchet MS" pitchFamily="34" charset="-120"/>
               </a:rPr>
-              <a:t>memor</a:t>
+              <a:t>summar</a:t>
             </a:r>
             <a:endParaRPr lang="en-US" sz="1300" dirty="0"/>
           </a:p>
@@ -27080,7 +27278,7 @@
                 <a:ea typeface="Calibri" pitchFamily="34" charset="-122"/>
                 <a:cs typeface="Calibri" pitchFamily="34" charset="-120"/>
               </a:rPr>
-              <a:t>memory, remember</a:t>
+              <a:t>sum, main points</a:t>
             </a:r>
             <a:endParaRPr lang="en-US" sz="850" dirty="0"/>
           </a:p>
@@ -27351,7 +27549,7 @@
                 <a:ea typeface="Trebuchet MS" pitchFamily="34" charset="-122"/>
                 <a:cs typeface="Trebuchet MS" pitchFamily="34" charset="-120"/>
               </a:rPr>
-              <a:t>mem</a:t>
+              <a:t>sum</a:t>
             </a:r>
             <a:endParaRPr lang="en-US" sz="1400" dirty="0"/>
           </a:p>
@@ -27456,7 +27654,7 @@
                 <a:ea typeface="Trebuchet MS" pitchFamily="34" charset="-122"/>
                 <a:cs typeface="Trebuchet MS" pitchFamily="34" charset="-120"/>
               </a:rPr>
-              <a:t>or</a:t>
+              <a:t>mar</a:t>
             </a:r>
             <a:endParaRPr lang="en-US" sz="1400" dirty="0"/>
           </a:p>
@@ -27668,7 +27866,7 @@
         </p:nvSpPr>
         <p:spPr>
           <a:xfrm>
-            <a:off x="2427732" y="4169664"/>
+            <a:off x="2254649" y="4169664"/>
             <a:ext cx="685800" cy="384048"/>
           </a:xfrm>
           <a:prstGeom prst="rect">
@@ -27695,7 +27893,7 @@
         </p:nvSpPr>
         <p:spPr>
           <a:xfrm>
-            <a:off x="2427732" y="4169664"/>
+            <a:off x="2254649" y="4169664"/>
             <a:ext cx="685800" cy="384048"/>
           </a:xfrm>
           <a:prstGeom prst="rect">
@@ -27720,7 +27918,7 @@
                 <a:ea typeface="Trebuchet MS" pitchFamily="34" charset="-122"/>
                 <a:cs typeface="Trebuchet MS" pitchFamily="34" charset="-120"/>
               </a:rPr>
-              <a:t>m</a:t>
+              <a:t>s</a:t>
             </a:r>
             <a:endParaRPr lang="en-US" sz="900" dirty="0"/>
           </a:p>
@@ -27734,7 +27932,7 @@
         </p:nvSpPr>
         <p:spPr>
           <a:xfrm>
-            <a:off x="3639312" y="4169664"/>
+            <a:off x="3293146" y="4169664"/>
             <a:ext cx="685800" cy="384048"/>
           </a:xfrm>
           <a:prstGeom prst="rect">
@@ -27761,7 +27959,7 @@
         </p:nvSpPr>
         <p:spPr>
           <a:xfrm>
-            <a:off x="3639312" y="4169664"/>
+            <a:off x="3293146" y="4169664"/>
             <a:ext cx="685800" cy="384048"/>
           </a:xfrm>
           <a:prstGeom prst="rect">
@@ -27786,7 +27984,7 @@
                 <a:ea typeface="Trebuchet MS" pitchFamily="34" charset="-122"/>
                 <a:cs typeface="Trebuchet MS" pitchFamily="34" charset="-120"/>
               </a:rPr>
-              <a:t>e</a:t>
+              <a:t>u</a:t>
             </a:r>
             <a:endParaRPr lang="en-US" sz="900" dirty="0"/>
           </a:p>
@@ -27800,7 +27998,7 @@
         </p:nvSpPr>
         <p:spPr>
           <a:xfrm>
-            <a:off x="4850892" y="4169664"/>
+            <a:off x="4331643" y="4169664"/>
             <a:ext cx="685800" cy="384048"/>
           </a:xfrm>
           <a:prstGeom prst="rect">
@@ -27827,7 +28025,7 @@
         </p:nvSpPr>
         <p:spPr>
           <a:xfrm>
-            <a:off x="4850892" y="4169664"/>
+            <a:off x="4331643" y="4169664"/>
             <a:ext cx="685800" cy="384048"/>
           </a:xfrm>
           <a:prstGeom prst="rect">
@@ -27852,7 +28050,7 @@
                 <a:ea typeface="Trebuchet MS" pitchFamily="34" charset="-122"/>
                 <a:cs typeface="Trebuchet MS" pitchFamily="34" charset="-120"/>
               </a:rPr>
-              <a:t>m</a:t>
+              <a:t>mm</a:t>
             </a:r>
             <a:endParaRPr lang="en-US" sz="900" dirty="0"/>
           </a:p>
@@ -27866,7 +28064,7 @@
         </p:nvSpPr>
         <p:spPr>
           <a:xfrm>
-            <a:off x="6062472" y="4169664"/>
+            <a:off x="5370141" y="4169664"/>
             <a:ext cx="685800" cy="384048"/>
           </a:xfrm>
           <a:prstGeom prst="rect">
@@ -27893,7 +28091,7 @@
         </p:nvSpPr>
         <p:spPr>
           <a:xfrm>
-            <a:off x="6062472" y="4169664"/>
+            <a:off x="5370141" y="4169664"/>
             <a:ext cx="685800" cy="384048"/>
           </a:xfrm>
           <a:prstGeom prst="rect">
@@ -27918,7 +28116,7 @@
                 <a:ea typeface="Trebuchet MS" pitchFamily="34" charset="-122"/>
                 <a:cs typeface="Trebuchet MS" pitchFamily="34" charset="-120"/>
               </a:rPr>
-              <a:t>or</a:t>
+              <a:t>ar</a:t>
             </a:r>
             <a:endParaRPr lang="en-US" sz="900" dirty="0"/>
           </a:p>
@@ -27932,7 +28130,7 @@
         </p:nvSpPr>
         <p:spPr>
           <a:xfrm>
-            <a:off x="7274052" y="4169664"/>
+            <a:off x="6408638" y="4169664"/>
             <a:ext cx="685800" cy="384048"/>
           </a:xfrm>
           <a:prstGeom prst="rect">
@@ -27959,7 +28157,7 @@
         </p:nvSpPr>
         <p:spPr>
           <a:xfrm>
-            <a:off x="7274052" y="4169664"/>
+            <a:off x="6408638" y="4169664"/>
             <a:ext cx="685800" cy="384048"/>
           </a:xfrm>
           <a:prstGeom prst="rect">
@@ -27984,7 +28182,7 @@
                 <a:ea typeface="Trebuchet MS" pitchFamily="34" charset="-122"/>
                 <a:cs typeface="Trebuchet MS" pitchFamily="34" charset="-120"/>
               </a:rPr>
-              <a:t>ise</a:t>
+              <a:t>i</a:t>
             </a:r>
             <a:endParaRPr lang="en-US" sz="900" dirty="0"/>
           </a:p>
@@ -27992,13 +28190,79 @@
       </p:sp>
       <p:sp>
         <p:nvSpPr>
-          <p:cNvPr id="46" name="Text 44"/>
-          <p:cNvSpPr/>
-          <p:nvPr/>
-        </p:nvSpPr>
-        <p:spPr>
-          <a:xfrm>
-            <a:off x="7274052" y="4572000"/>
+          <p:cNvPr id="46" name="Shape 44"/>
+          <p:cNvSpPr/>
+          <p:nvPr/>
+        </p:nvSpPr>
+        <p:spPr>
+          <a:xfrm>
+            <a:off x="7447135" y="4169664"/>
+            <a:ext cx="685800" cy="384048"/>
+          </a:xfrm>
+          <a:prstGeom prst="rect">
+            <a:avLst>
+              <a:gd name="adj" fmla="val 9524"/>
+            </a:avLst>
+          </a:prstGeom>
+          <a:solidFill>
+            <a:srgbClr val="FFFFFF"/>
+          </a:solidFill>
+          <a:ln w="12700">
+            <a:solidFill>
+              <a:srgbClr val="DB2777"/>
+            </a:solidFill>
+            <a:prstDash val="solid"/>
+          </a:ln>
+        </p:spPr>
+      </p:sp>
+      <p:sp>
+        <p:nvSpPr>
+          <p:cNvPr id="47" name="Text 45"/>
+          <p:cNvSpPr/>
+          <p:nvPr/>
+        </p:nvSpPr>
+        <p:spPr>
+          <a:xfrm>
+            <a:off x="7447135" y="4169664"/>
+            <a:ext cx="685800" cy="384048"/>
+          </a:xfrm>
+          <a:prstGeom prst="rect">
+            <a:avLst/>
+          </a:prstGeom>
+          <a:noFill/>
+          <a:ln/>
+        </p:spPr>
+        <p:txBody>
+          <a:bodyPr wrap="square" lIns="0" tIns="0" rIns="0" bIns="0" rtlCol="0" anchor="ctr"/>
+          <a:lstStyle/>
+          <a:p>
+            <a:pPr algn="ctr" indent="0" marL="0">
+              <a:buNone/>
+            </a:pPr>
+            <a:r>
+              <a:rPr lang="en-US" sz="900" b="1" dirty="0">
+                <a:solidFill>
+                  <a:srgbClr val="9D174D"/>
+                </a:solidFill>
+                <a:latin typeface="Trebuchet MS" pitchFamily="34" charset="0"/>
+                <a:ea typeface="Trebuchet MS" pitchFamily="34" charset="-122"/>
+                <a:cs typeface="Trebuchet MS" pitchFamily="34" charset="-120"/>
+              </a:rPr>
+              <a:t>se</a:t>
+            </a:r>
+            <a:endParaRPr lang="en-US" sz="900" dirty="0"/>
+          </a:p>
+        </p:txBody>
+      </p:sp>
+      <p:sp>
+        <p:nvSpPr>
+          <p:cNvPr id="48" name="Text 46"/>
+          <p:cNvSpPr/>
+          <p:nvPr/>
+        </p:nvSpPr>
+        <p:spPr>
+          <a:xfrm>
+            <a:off x="7447135" y="4572000"/>
             <a:ext cx="685800" cy="219456"/>
           </a:xfrm>
           <a:prstGeom prst="rect">
@@ -28023,7 +28287,7 @@
                 <a:ea typeface="Calibri" pitchFamily="34" charset="-122"/>
                 <a:cs typeface="Calibri" pitchFamily="34" charset="-120"/>
               </a:rPr>
-              <a:t>/ize/</a:t>
+              <a:t>/z/</a:t>
             </a:r>
             <a:endParaRPr lang="en-US" sz="750" dirty="0"/>
           </a:p>
@@ -28454,7 +28718,7 @@
                 <a:ea typeface="Trebuchet MS" pitchFamily="34" charset="-122"/>
                 <a:cs typeface="Trebuchet MS" pitchFamily="34" charset="-120"/>
               </a:rPr>
-              <a:t>apologise</a:t>
+              <a:t>realise</a:t>
             </a:r>
             <a:endParaRPr lang="en-US" sz="2800" dirty="0"/>
           </a:p>
@@ -29281,7 +29545,7 @@
                 <a:ea typeface="Trebuchet MS" pitchFamily="34" charset="-122"/>
                 <a:cs typeface="Trebuchet MS" pitchFamily="34" charset="-120"/>
               </a:rPr>
-              <a:t>apologise</a:t>
+              <a:t>realise</a:t>
             </a:r>
             <a:endParaRPr lang="en-US" sz="2800" dirty="0"/>
           </a:p>
@@ -29361,7 +29625,7 @@
         </p:nvSpPr>
         <p:spPr>
           <a:xfrm>
-            <a:off x="2221992" y="2258568"/>
+            <a:off x="2938272" y="2258568"/>
             <a:ext cx="1828800" cy="292608"/>
           </a:xfrm>
           <a:prstGeom prst="rect">
@@ -29395,7 +29659,7 @@
         </p:nvSpPr>
         <p:spPr>
           <a:xfrm>
-            <a:off x="2221992" y="2258568"/>
+            <a:off x="2938272" y="2258568"/>
             <a:ext cx="1828800" cy="292608"/>
           </a:xfrm>
           <a:prstGeom prst="rect">
@@ -29420,7 +29684,7 @@
                 <a:ea typeface="Trebuchet MS" pitchFamily="34" charset="-122"/>
                 <a:cs typeface="Trebuchet MS" pitchFamily="34" charset="-120"/>
               </a:rPr>
-              <a:t>apo</a:t>
+              <a:t>real</a:t>
             </a:r>
             <a:endParaRPr lang="en-US" sz="1300" dirty="0"/>
           </a:p>
@@ -29434,7 +29698,7 @@
         </p:nvSpPr>
         <p:spPr>
           <a:xfrm>
-            <a:off x="2221992" y="2569464"/>
+            <a:off x="2938272" y="2569464"/>
             <a:ext cx="1828800" cy="201168"/>
           </a:xfrm>
           <a:prstGeom prst="rect">
@@ -29459,7 +29723,7 @@
                 <a:ea typeface="Calibri" pitchFamily="34" charset="-122"/>
                 <a:cs typeface="Calibri" pitchFamily="34" charset="-120"/>
               </a:rPr>
-              <a:t>away from, off</a:t>
+              <a:t>actual, true</a:t>
             </a:r>
             <a:endParaRPr lang="en-US" sz="850" dirty="0"/>
           </a:p>
@@ -29473,7 +29737,7 @@
         </p:nvSpPr>
         <p:spPr>
           <a:xfrm>
-            <a:off x="4370832" y="2258568"/>
+            <a:off x="5803392" y="2258568"/>
             <a:ext cx="1828800" cy="292608"/>
           </a:xfrm>
           <a:prstGeom prst="rect">
@@ -29482,11 +29746,11 @@
             </a:avLst>
           </a:prstGeom>
           <a:solidFill>
-            <a:srgbClr val="FCE7F3"/>
+            <a:srgbClr val="CCFBF1"/>
           </a:solidFill>
           <a:ln w="19050">
             <a:solidFill>
-              <a:srgbClr val="DB2777"/>
+              <a:srgbClr val="0D9488"/>
             </a:solidFill>
             <a:prstDash val="solid"/>
           </a:ln>
@@ -29507,7 +29771,7 @@
         </p:nvSpPr>
         <p:spPr>
           <a:xfrm>
-            <a:off x="4370832" y="2258568"/>
+            <a:off x="5803392" y="2258568"/>
             <a:ext cx="1828800" cy="292608"/>
           </a:xfrm>
           <a:prstGeom prst="rect">
@@ -29526,13 +29790,13 @@
             <a:r>
               <a:rPr lang="en-US" sz="1300" b="1" dirty="0">
                 <a:solidFill>
-                  <a:srgbClr val="9D174D"/>
+                  <a:srgbClr val="0F766E"/>
                 </a:solidFill>
                 <a:latin typeface="Trebuchet MS" pitchFamily="34" charset="0"/>
                 <a:ea typeface="Trebuchet MS" pitchFamily="34" charset="-122"/>
                 <a:cs typeface="Trebuchet MS" pitchFamily="34" charset="-120"/>
               </a:rPr>
-              <a:t>log</a:t>
+              <a:t>ise</a:t>
             </a:r>
             <a:endParaRPr lang="en-US" sz="1300" dirty="0"/>
           </a:p>
@@ -29546,7 +29810,7 @@
         </p:nvSpPr>
         <p:spPr>
           <a:xfrm>
-            <a:off x="4370832" y="2569464"/>
+            <a:off x="5803392" y="2569464"/>
             <a:ext cx="1828800" cy="201168"/>
           </a:xfrm>
           <a:prstGeom prst="rect">
@@ -29571,7 +29835,7 @@
                 <a:ea typeface="Calibri" pitchFamily="34" charset="-122"/>
                 <a:cs typeface="Calibri" pitchFamily="34" charset="-120"/>
               </a:rPr>
-              <a:t>word, reason, speech</a:t>
+              <a:t>to make or become</a:t>
             </a:r>
             <a:endParaRPr lang="en-US" sz="850" dirty="0"/>
           </a:p>
@@ -29585,30 +29849,23 @@
         </p:nvSpPr>
         <p:spPr>
           <a:xfrm>
-            <a:off x="6519672" y="2258568"/>
-            <a:ext cx="1828800" cy="292608"/>
+            <a:off x="365760" y="3273552"/>
+            <a:ext cx="1371600" cy="658368"/>
           </a:xfrm>
           <a:prstGeom prst="rect">
             <a:avLst>
-              <a:gd name="adj" fmla="val 25000"/>
+              <a:gd name="adj" fmla="val 8333"/>
             </a:avLst>
           </a:prstGeom>
           <a:solidFill>
-            <a:srgbClr val="CCFBF1"/>
-          </a:solidFill>
-          <a:ln w="19050">
-            <a:solidFill>
-              <a:srgbClr val="0D9488"/>
-            </a:solidFill>
-            <a:prstDash val="solid"/>
-          </a:ln>
-          <a:effectLst>
-            <a:outerShdw sx="100000" sy="100000" kx="0" ky="0" algn="bl" rotWithShape="0" blurRad="101600" dist="38100" dir="8100000">
-              <a:srgbClr val="000000">
-                <a:alpha val="12000"/>
-              </a:srgbClr>
-            </a:outerShdw>
-          </a:effectLst>
+            <a:srgbClr val="E2E8F0"/>
+          </a:solidFill>
+          <a:ln w="12700">
+            <a:solidFill>
+              <a:srgbClr val="E2E8F0"/>
+            </a:solidFill>
+            <a:prstDash val="solid"/>
+          </a:ln>
         </p:spPr>
       </p:sp>
       <p:sp>
@@ -29619,90 +29876,117 @@
         </p:nvSpPr>
         <p:spPr>
           <a:xfrm>
-            <a:off x="6519672" y="2258568"/>
-            <a:ext cx="1828800" cy="292608"/>
-          </a:xfrm>
-          <a:prstGeom prst="rect">
-            <a:avLst/>
-          </a:prstGeom>
-          <a:noFill/>
-          <a:ln/>
-        </p:spPr>
-        <p:txBody>
-          <a:bodyPr wrap="square" lIns="0" tIns="0" rIns="0" bIns="0" rtlCol="0" anchor="ctr"/>
-          <a:lstStyle/>
-          <a:p>
-            <a:pPr algn="ctr" indent="0" marL="0">
-              <a:buNone/>
-            </a:pPr>
-            <a:r>
-              <a:rPr lang="en-US" sz="1300" b="1" dirty="0">
-                <a:solidFill>
-                  <a:srgbClr val="0F766E"/>
+            <a:off x="365760" y="3273552"/>
+            <a:ext cx="1371600" cy="658368"/>
+          </a:xfrm>
+          <a:prstGeom prst="rect">
+            <a:avLst/>
+          </a:prstGeom>
+          <a:noFill/>
+          <a:ln/>
+        </p:spPr>
+        <p:txBody>
+          <a:bodyPr wrap="square" lIns="0" tIns="0" rIns="0" bIns="0" rtlCol="0" anchor="ctr"/>
+          <a:lstStyle/>
+          <a:p>
+            <a:pPr algn="ctr" indent="0" marL="0">
+              <a:buNone/>
+            </a:pPr>
+            <a:r>
+              <a:rPr lang="en-US" sz="1100" b="1" dirty="0">
+                <a:solidFill>
+                  <a:srgbClr val="475569"/>
                 </a:solidFill>
                 <a:latin typeface="Trebuchet MS" pitchFamily="34" charset="0"/>
                 <a:ea typeface="Trebuchet MS" pitchFamily="34" charset="-122"/>
                 <a:cs typeface="Trebuchet MS" pitchFamily="34" charset="-120"/>
               </a:rPr>
-              <a:t>ise</a:t>
-            </a:r>
-            <a:endParaRPr lang="en-US" sz="1300" dirty="0"/>
-          </a:p>
-        </p:txBody>
-      </p:sp>
-      <p:sp>
-        <p:nvSpPr>
-          <p:cNvPr id="24" name="Text 22"/>
-          <p:cNvSpPr/>
-          <p:nvPr/>
-        </p:nvSpPr>
-        <p:spPr>
-          <a:xfrm>
-            <a:off x="6519672" y="2569464"/>
-            <a:ext cx="1828800" cy="201168"/>
-          </a:xfrm>
-          <a:prstGeom prst="rect">
-            <a:avLst/>
-          </a:prstGeom>
-          <a:noFill/>
-          <a:ln/>
-        </p:spPr>
-        <p:txBody>
-          <a:bodyPr wrap="square" lIns="0" tIns="0" rIns="0" bIns="0" rtlCol="0" anchor="t"/>
-          <a:lstStyle/>
-          <a:p>
-            <a:pPr algn="ctr" indent="0" marL="0">
-              <a:buNone/>
-            </a:pPr>
-            <a:r>
-              <a:rPr lang="en-US" sz="850" dirty="0">
-                <a:solidFill>
-                  <a:srgbClr val="475569"/>
+              <a:t>Syllables</a:t>
+            </a:r>
+            <a:endParaRPr lang="en-US" sz="1100" dirty="0"/>
+          </a:p>
+        </p:txBody>
+      </p:sp>
+      <p:sp>
+        <p:nvSpPr>
+          <p:cNvPr id="24" name="Shape 22"/>
+          <p:cNvSpPr/>
+          <p:nvPr/>
+        </p:nvSpPr>
+        <p:spPr>
+          <a:xfrm>
+            <a:off x="1874520" y="3273552"/>
+            <a:ext cx="6903720" cy="658368"/>
+          </a:xfrm>
+          <a:prstGeom prst="rect">
+            <a:avLst>
+              <a:gd name="adj" fmla="val 8333"/>
+            </a:avLst>
+          </a:prstGeom>
+          <a:solidFill>
+            <a:srgbClr val="F8FAFC"/>
+          </a:solidFill>
+          <a:ln w="12700">
+            <a:solidFill>
+              <a:srgbClr val="E2E8F0"/>
+            </a:solidFill>
+            <a:prstDash val="dash"/>
+          </a:ln>
+        </p:spPr>
+      </p:sp>
+      <p:sp>
+        <p:nvSpPr>
+          <p:cNvPr id="25" name="Text 23"/>
+          <p:cNvSpPr/>
+          <p:nvPr/>
+        </p:nvSpPr>
+        <p:spPr>
+          <a:xfrm>
+            <a:off x="1874520" y="3273552"/>
+            <a:ext cx="6903720" cy="658368"/>
+          </a:xfrm>
+          <a:prstGeom prst="rect">
+            <a:avLst/>
+          </a:prstGeom>
+          <a:noFill/>
+          <a:ln/>
+        </p:spPr>
+        <p:txBody>
+          <a:bodyPr wrap="square" rtlCol="0" anchor="ctr"/>
+          <a:lstStyle/>
+          <a:p>
+            <a:pPr algn="ctr" indent="0" marL="0">
+              <a:buNone/>
+            </a:pPr>
+            <a:r>
+              <a:rPr lang="en-US" sz="1100" i="1" dirty="0">
+                <a:solidFill>
+                  <a:srgbClr val="CBD5E1"/>
                 </a:solidFill>
                 <a:latin typeface="Calibri" pitchFamily="34" charset="0"/>
                 <a:ea typeface="Calibri" pitchFamily="34" charset="-122"/>
                 <a:cs typeface="Calibri" pitchFamily="34" charset="-120"/>
               </a:rPr>
-              <a:t>to make or become</a:t>
-            </a:r>
-            <a:endParaRPr lang="en-US" sz="850" dirty="0"/>
-          </a:p>
-        </p:txBody>
-      </p:sp>
-      <p:sp>
-        <p:nvSpPr>
-          <p:cNvPr id="25" name="Shape 23"/>
-          <p:cNvSpPr/>
-          <p:nvPr/>
-        </p:nvSpPr>
-        <p:spPr>
-          <a:xfrm>
-            <a:off x="365760" y="3273552"/>
-            <a:ext cx="1371600" cy="658368"/>
+              <a:t>Write here...</a:t>
+            </a:r>
+            <a:endParaRPr lang="en-US" sz="1100" dirty="0"/>
+          </a:p>
+        </p:txBody>
+      </p:sp>
+      <p:sp>
+        <p:nvSpPr>
+          <p:cNvPr id="26" name="Shape 24"/>
+          <p:cNvSpPr/>
+          <p:nvPr/>
+        </p:nvSpPr>
+        <p:spPr>
+          <a:xfrm>
+            <a:off x="365760" y="4096512"/>
+            <a:ext cx="1371600" cy="804672"/>
           </a:xfrm>
           <a:prstGeom prst="rect">
             <a:avLst>
-              <a:gd name="adj" fmla="val 8333"/>
+              <a:gd name="adj" fmla="val 6818"/>
             </a:avLst>
           </a:prstGeom>
           <a:solidFill>
@@ -29718,14 +30002,14 @@
       </p:sp>
       <p:sp>
         <p:nvSpPr>
-          <p:cNvPr id="26" name="Text 24"/>
-          <p:cNvSpPr/>
-          <p:nvPr/>
-        </p:nvSpPr>
-        <p:spPr>
-          <a:xfrm>
-            <a:off x="365760" y="3273552"/>
-            <a:ext cx="1371600" cy="658368"/>
+          <p:cNvPr id="27" name="Text 25"/>
+          <p:cNvSpPr/>
+          <p:nvPr/>
+        </p:nvSpPr>
+        <p:spPr>
+          <a:xfrm>
+            <a:off x="365760" y="4096512"/>
+            <a:ext cx="1371600" cy="804672"/>
           </a:xfrm>
           <a:prstGeom prst="rect">
             <a:avLst/>
@@ -29749,7 +30033,7 @@
                 <a:ea typeface="Trebuchet MS" pitchFamily="34" charset="-122"/>
                 <a:cs typeface="Trebuchet MS" pitchFamily="34" charset="-120"/>
               </a:rPr>
-              <a:t>Syllables</a:t>
+              <a:t>Phonemes</a:t>
             </a:r>
             <a:endParaRPr lang="en-US" sz="1100" dirty="0"/>
           </a:p>
@@ -29757,80 +30041,14 @@
       </p:sp>
       <p:sp>
         <p:nvSpPr>
-          <p:cNvPr id="27" name="Shape 25"/>
-          <p:cNvSpPr/>
-          <p:nvPr/>
-        </p:nvSpPr>
-        <p:spPr>
-          <a:xfrm>
-            <a:off x="1874520" y="3273552"/>
-            <a:ext cx="6903720" cy="658368"/>
-          </a:xfrm>
-          <a:prstGeom prst="rect">
-            <a:avLst>
-              <a:gd name="adj" fmla="val 8333"/>
-            </a:avLst>
-          </a:prstGeom>
-          <a:solidFill>
-            <a:srgbClr val="F8FAFC"/>
-          </a:solidFill>
-          <a:ln w="12700">
-            <a:solidFill>
-              <a:srgbClr val="E2E8F0"/>
-            </a:solidFill>
-            <a:prstDash val="dash"/>
-          </a:ln>
-        </p:spPr>
-      </p:sp>
-      <p:sp>
-        <p:nvSpPr>
-          <p:cNvPr id="28" name="Text 26"/>
-          <p:cNvSpPr/>
-          <p:nvPr/>
-        </p:nvSpPr>
-        <p:spPr>
-          <a:xfrm>
-            <a:off x="1874520" y="3273552"/>
-            <a:ext cx="6903720" cy="658368"/>
-          </a:xfrm>
-          <a:prstGeom prst="rect">
-            <a:avLst/>
-          </a:prstGeom>
-          <a:noFill/>
-          <a:ln/>
-        </p:spPr>
-        <p:txBody>
-          <a:bodyPr wrap="square" rtlCol="0" anchor="ctr"/>
-          <a:lstStyle/>
-          <a:p>
-            <a:pPr algn="ctr" indent="0" marL="0">
-              <a:buNone/>
-            </a:pPr>
-            <a:r>
-              <a:rPr lang="en-US" sz="1100" i="1" dirty="0">
-                <a:solidFill>
-                  <a:srgbClr val="CBD5E1"/>
-                </a:solidFill>
-                <a:latin typeface="Calibri" pitchFamily="34" charset="0"/>
-                <a:ea typeface="Calibri" pitchFamily="34" charset="-122"/>
-                <a:cs typeface="Calibri" pitchFamily="34" charset="-120"/>
-              </a:rPr>
-              <a:t>Write here...</a:t>
-            </a:r>
-            <a:endParaRPr lang="en-US" sz="1100" dirty="0"/>
-          </a:p>
-        </p:txBody>
-      </p:sp>
-      <p:sp>
-        <p:nvSpPr>
-          <p:cNvPr id="29" name="Shape 27"/>
-          <p:cNvSpPr/>
-          <p:nvPr/>
-        </p:nvSpPr>
-        <p:spPr>
-          <a:xfrm>
-            <a:off x="365760" y="4096512"/>
-            <a:ext cx="1371600" cy="804672"/>
+          <p:cNvPr id="28" name="Shape 26"/>
+          <p:cNvSpPr/>
+          <p:nvPr/>
+        </p:nvSpPr>
+        <p:spPr>
+          <a:xfrm>
+            <a:off x="1874520" y="4096512"/>
+            <a:ext cx="6903720" cy="804672"/>
           </a:xfrm>
           <a:prstGeom prst="rect">
             <a:avLst>
@@ -29838,85 +30056,19 @@
             </a:avLst>
           </a:prstGeom>
           <a:solidFill>
-            <a:srgbClr val="E2E8F0"/>
+            <a:srgbClr val="F8FAFC"/>
           </a:solidFill>
           <a:ln w="12700">
             <a:solidFill>
               <a:srgbClr val="E2E8F0"/>
             </a:solidFill>
-            <a:prstDash val="solid"/>
-          </a:ln>
-        </p:spPr>
-      </p:sp>
-      <p:sp>
-        <p:nvSpPr>
-          <p:cNvPr id="30" name="Text 28"/>
-          <p:cNvSpPr/>
-          <p:nvPr/>
-        </p:nvSpPr>
-        <p:spPr>
-          <a:xfrm>
-            <a:off x="365760" y="4096512"/>
-            <a:ext cx="1371600" cy="804672"/>
-          </a:xfrm>
-          <a:prstGeom prst="rect">
-            <a:avLst/>
-          </a:prstGeom>
-          <a:noFill/>
-          <a:ln/>
-        </p:spPr>
-        <p:txBody>
-          <a:bodyPr wrap="square" lIns="0" tIns="0" rIns="0" bIns="0" rtlCol="0" anchor="ctr"/>
-          <a:lstStyle/>
-          <a:p>
-            <a:pPr algn="ctr" indent="0" marL="0">
-              <a:buNone/>
-            </a:pPr>
-            <a:r>
-              <a:rPr lang="en-US" sz="1100" b="1" dirty="0">
-                <a:solidFill>
-                  <a:srgbClr val="475569"/>
-                </a:solidFill>
-                <a:latin typeface="Trebuchet MS" pitchFamily="34" charset="0"/>
-                <a:ea typeface="Trebuchet MS" pitchFamily="34" charset="-122"/>
-                <a:cs typeface="Trebuchet MS" pitchFamily="34" charset="-120"/>
-              </a:rPr>
-              <a:t>Phonemes</a:t>
-            </a:r>
-            <a:endParaRPr lang="en-US" sz="1100" dirty="0"/>
-          </a:p>
-        </p:txBody>
-      </p:sp>
-      <p:sp>
-        <p:nvSpPr>
-          <p:cNvPr id="31" name="Shape 29"/>
-          <p:cNvSpPr/>
-          <p:nvPr/>
-        </p:nvSpPr>
-        <p:spPr>
-          <a:xfrm>
-            <a:off x="1874520" y="4096512"/>
-            <a:ext cx="6903720" cy="804672"/>
-          </a:xfrm>
-          <a:prstGeom prst="rect">
-            <a:avLst>
-              <a:gd name="adj" fmla="val 6818"/>
-            </a:avLst>
-          </a:prstGeom>
-          <a:solidFill>
-            <a:srgbClr val="F8FAFC"/>
-          </a:solidFill>
-          <a:ln w="12700">
-            <a:solidFill>
-              <a:srgbClr val="E2E8F0"/>
-            </a:solidFill>
             <a:prstDash val="dash"/>
           </a:ln>
         </p:spPr>
       </p:sp>
       <p:sp>
         <p:nvSpPr>
-          <p:cNvPr id="32" name="Text 30"/>
+          <p:cNvPr id="29" name="Text 27"/>
           <p:cNvSpPr/>
           <p:nvPr/>
         </p:nvSpPr>
@@ -30378,7 +30530,7 @@
                 <a:ea typeface="Trebuchet MS" pitchFamily="34" charset="-122"/>
                 <a:cs typeface="Trebuchet MS" pitchFamily="34" charset="-120"/>
               </a:rPr>
-              <a:t>apologise</a:t>
+              <a:t>realise</a:t>
             </a:r>
             <a:endParaRPr lang="en-US" sz="2800" dirty="0"/>
           </a:p>
@@ -30458,7 +30610,7 @@
         </p:nvSpPr>
         <p:spPr>
           <a:xfrm>
-            <a:off x="2221992" y="2258568"/>
+            <a:off x="2938272" y="2258568"/>
             <a:ext cx="1828800" cy="292608"/>
           </a:xfrm>
           <a:prstGeom prst="rect">
@@ -30492,7 +30644,7 @@
         </p:nvSpPr>
         <p:spPr>
           <a:xfrm>
-            <a:off x="2221992" y="2258568"/>
+            <a:off x="2938272" y="2258568"/>
             <a:ext cx="1828800" cy="292608"/>
           </a:xfrm>
           <a:prstGeom prst="rect">
@@ -30517,7 +30669,7 @@
                 <a:ea typeface="Trebuchet MS" pitchFamily="34" charset="-122"/>
                 <a:cs typeface="Trebuchet MS" pitchFamily="34" charset="-120"/>
               </a:rPr>
-              <a:t>apo</a:t>
+              <a:t>real</a:t>
             </a:r>
             <a:endParaRPr lang="en-US" sz="1300" dirty="0"/>
           </a:p>
@@ -30531,7 +30683,7 @@
         </p:nvSpPr>
         <p:spPr>
           <a:xfrm>
-            <a:off x="2221992" y="2569464"/>
+            <a:off x="2938272" y="2569464"/>
             <a:ext cx="1828800" cy="201168"/>
           </a:xfrm>
           <a:prstGeom prst="rect">
@@ -30556,7 +30708,7 @@
                 <a:ea typeface="Calibri" pitchFamily="34" charset="-122"/>
                 <a:cs typeface="Calibri" pitchFamily="34" charset="-120"/>
               </a:rPr>
-              <a:t>away from, off</a:t>
+              <a:t>actual, true</a:t>
             </a:r>
             <a:endParaRPr lang="en-US" sz="850" dirty="0"/>
           </a:p>
@@ -30570,7 +30722,7 @@
         </p:nvSpPr>
         <p:spPr>
           <a:xfrm>
-            <a:off x="4370832" y="2258568"/>
+            <a:off x="5803392" y="2258568"/>
             <a:ext cx="1828800" cy="292608"/>
           </a:xfrm>
           <a:prstGeom prst="rect">
@@ -30579,11 +30731,11 @@
             </a:avLst>
           </a:prstGeom>
           <a:solidFill>
-            <a:srgbClr val="FCE7F3"/>
+            <a:srgbClr val="CCFBF1"/>
           </a:solidFill>
           <a:ln w="19050">
             <a:solidFill>
-              <a:srgbClr val="DB2777"/>
+              <a:srgbClr val="0D9488"/>
             </a:solidFill>
             <a:prstDash val="solid"/>
           </a:ln>
@@ -30604,7 +30756,7 @@
         </p:nvSpPr>
         <p:spPr>
           <a:xfrm>
-            <a:off x="4370832" y="2258568"/>
+            <a:off x="5803392" y="2258568"/>
             <a:ext cx="1828800" cy="292608"/>
           </a:xfrm>
           <a:prstGeom prst="rect">
@@ -30623,13 +30775,13 @@
             <a:r>
               <a:rPr lang="en-US" sz="1300" b="1" dirty="0">
                 <a:solidFill>
-                  <a:srgbClr val="9D174D"/>
+                  <a:srgbClr val="0F766E"/>
                 </a:solidFill>
                 <a:latin typeface="Trebuchet MS" pitchFamily="34" charset="0"/>
                 <a:ea typeface="Trebuchet MS" pitchFamily="34" charset="-122"/>
                 <a:cs typeface="Trebuchet MS" pitchFamily="34" charset="-120"/>
               </a:rPr>
-              <a:t>log</a:t>
+              <a:t>ise</a:t>
             </a:r>
             <a:endParaRPr lang="en-US" sz="1300" dirty="0"/>
           </a:p>
@@ -30643,7 +30795,7 @@
         </p:nvSpPr>
         <p:spPr>
           <a:xfrm>
-            <a:off x="4370832" y="2569464"/>
+            <a:off x="5803392" y="2569464"/>
             <a:ext cx="1828800" cy="201168"/>
           </a:xfrm>
           <a:prstGeom prst="rect">
@@ -30668,7 +30820,7 @@
                 <a:ea typeface="Calibri" pitchFamily="34" charset="-122"/>
                 <a:cs typeface="Calibri" pitchFamily="34" charset="-120"/>
               </a:rPr>
-              <a:t>word, reason, speech</a:t>
+              <a:t>to make or become</a:t>
             </a:r>
             <a:endParaRPr lang="en-US" sz="850" dirty="0"/>
           </a:p>
@@ -30682,30 +30834,23 @@
         </p:nvSpPr>
         <p:spPr>
           <a:xfrm>
-            <a:off x="6519672" y="2258568"/>
-            <a:ext cx="1828800" cy="292608"/>
+            <a:off x="365760" y="3273552"/>
+            <a:ext cx="1371600" cy="658368"/>
           </a:xfrm>
           <a:prstGeom prst="rect">
             <a:avLst>
-              <a:gd name="adj" fmla="val 25000"/>
+              <a:gd name="adj" fmla="val 8333"/>
             </a:avLst>
           </a:prstGeom>
           <a:solidFill>
-            <a:srgbClr val="CCFBF1"/>
-          </a:solidFill>
-          <a:ln w="19050">
-            <a:solidFill>
-              <a:srgbClr val="0D9488"/>
-            </a:solidFill>
-            <a:prstDash val="solid"/>
-          </a:ln>
-          <a:effectLst>
-            <a:outerShdw sx="100000" sy="100000" kx="0" ky="0" algn="bl" rotWithShape="0" blurRad="101600" dist="38100" dir="8100000">
-              <a:srgbClr val="000000">
-                <a:alpha val="12000"/>
-              </a:srgbClr>
-            </a:outerShdw>
-          </a:effectLst>
+            <a:srgbClr val="E2E8F0"/>
+          </a:solidFill>
+          <a:ln w="12700">
+            <a:solidFill>
+              <a:srgbClr val="E2E8F0"/>
+            </a:solidFill>
+            <a:prstDash val="solid"/>
+          </a:ln>
         </p:spPr>
       </p:sp>
       <p:sp>
@@ -30716,86 +30861,47 @@
         </p:nvSpPr>
         <p:spPr>
           <a:xfrm>
-            <a:off x="6519672" y="2258568"/>
-            <a:ext cx="1828800" cy="292608"/>
-          </a:xfrm>
-          <a:prstGeom prst="rect">
-            <a:avLst/>
-          </a:prstGeom>
-          <a:noFill/>
-          <a:ln/>
-        </p:spPr>
-        <p:txBody>
-          <a:bodyPr wrap="square" lIns="0" tIns="0" rIns="0" bIns="0" rtlCol="0" anchor="ctr"/>
-          <a:lstStyle/>
-          <a:p>
-            <a:pPr algn="ctr" indent="0" marL="0">
-              <a:buNone/>
-            </a:pPr>
-            <a:r>
-              <a:rPr lang="en-US" sz="1300" b="1" dirty="0">
-                <a:solidFill>
-                  <a:srgbClr val="0F766E"/>
+            <a:off x="365760" y="3273552"/>
+            <a:ext cx="1371600" cy="658368"/>
+          </a:xfrm>
+          <a:prstGeom prst="rect">
+            <a:avLst/>
+          </a:prstGeom>
+          <a:noFill/>
+          <a:ln/>
+        </p:spPr>
+        <p:txBody>
+          <a:bodyPr wrap="square" lIns="0" tIns="0" rIns="0" bIns="0" rtlCol="0" anchor="ctr"/>
+          <a:lstStyle/>
+          <a:p>
+            <a:pPr algn="ctr" indent="0" marL="0">
+              <a:buNone/>
+            </a:pPr>
+            <a:r>
+              <a:rPr lang="en-US" sz="1100" b="1" dirty="0">
+                <a:solidFill>
+                  <a:srgbClr val="475569"/>
                 </a:solidFill>
                 <a:latin typeface="Trebuchet MS" pitchFamily="34" charset="0"/>
                 <a:ea typeface="Trebuchet MS" pitchFamily="34" charset="-122"/>
                 <a:cs typeface="Trebuchet MS" pitchFamily="34" charset="-120"/>
               </a:rPr>
-              <a:t>ise</a:t>
-            </a:r>
-            <a:endParaRPr lang="en-US" sz="1300" dirty="0"/>
-          </a:p>
-        </p:txBody>
-      </p:sp>
-      <p:sp>
-        <p:nvSpPr>
-          <p:cNvPr id="24" name="Text 22"/>
-          <p:cNvSpPr/>
-          <p:nvPr/>
-        </p:nvSpPr>
-        <p:spPr>
-          <a:xfrm>
-            <a:off x="6519672" y="2569464"/>
-            <a:ext cx="1828800" cy="201168"/>
-          </a:xfrm>
-          <a:prstGeom prst="rect">
-            <a:avLst/>
-          </a:prstGeom>
-          <a:noFill/>
-          <a:ln/>
-        </p:spPr>
-        <p:txBody>
-          <a:bodyPr wrap="square" lIns="0" tIns="0" rIns="0" bIns="0" rtlCol="0" anchor="t"/>
-          <a:lstStyle/>
-          <a:p>
-            <a:pPr algn="ctr" indent="0" marL="0">
-              <a:buNone/>
-            </a:pPr>
-            <a:r>
-              <a:rPr lang="en-US" sz="850" dirty="0">
-                <a:solidFill>
-                  <a:srgbClr val="475569"/>
-                </a:solidFill>
-                <a:latin typeface="Calibri" pitchFamily="34" charset="0"/>
-                <a:ea typeface="Calibri" pitchFamily="34" charset="-122"/>
-                <a:cs typeface="Calibri" pitchFamily="34" charset="-120"/>
-              </a:rPr>
-              <a:t>to make or become</a:t>
-            </a:r>
-            <a:endParaRPr lang="en-US" sz="850" dirty="0"/>
-          </a:p>
-        </p:txBody>
-      </p:sp>
-      <p:sp>
-        <p:nvSpPr>
-          <p:cNvPr id="25" name="Shape 23"/>
-          <p:cNvSpPr/>
-          <p:nvPr/>
-        </p:nvSpPr>
-        <p:spPr>
-          <a:xfrm>
-            <a:off x="365760" y="3273552"/>
-            <a:ext cx="1371600" cy="658368"/>
+              <a:t>Syllables</a:t>
+            </a:r>
+            <a:endParaRPr lang="en-US" sz="1100" dirty="0"/>
+          </a:p>
+        </p:txBody>
+      </p:sp>
+      <p:sp>
+        <p:nvSpPr>
+          <p:cNvPr id="24" name="Shape 22"/>
+          <p:cNvSpPr/>
+          <p:nvPr/>
+        </p:nvSpPr>
+        <p:spPr>
+          <a:xfrm>
+            <a:off x="1874520" y="3273552"/>
+            <a:ext cx="6903720" cy="658368"/>
           </a:xfrm>
           <a:prstGeom prst="rect">
             <a:avLst>
@@ -30803,11 +30909,38 @@
             </a:avLst>
           </a:prstGeom>
           <a:solidFill>
-            <a:srgbClr val="E2E8F0"/>
-          </a:solidFill>
-          <a:ln w="12700">
-            <a:solidFill>
-              <a:srgbClr val="E2E8F0"/>
+            <a:srgbClr val="CCFBF1"/>
+          </a:solidFill>
+          <a:ln w="12700">
+            <a:solidFill>
+              <a:srgbClr val="0D9488"/>
+            </a:solidFill>
+            <a:prstDash val="solid"/>
+          </a:ln>
+        </p:spPr>
+      </p:sp>
+      <p:sp>
+        <p:nvSpPr>
+          <p:cNvPr id="25" name="Shape 23"/>
+          <p:cNvSpPr/>
+          <p:nvPr/>
+        </p:nvSpPr>
+        <p:spPr>
+          <a:xfrm>
+            <a:off x="2313432" y="3364992"/>
+            <a:ext cx="1645920" cy="475488"/>
+          </a:xfrm>
+          <a:prstGeom prst="rect">
+            <a:avLst>
+              <a:gd name="adj" fmla="val 9615"/>
+            </a:avLst>
+          </a:prstGeom>
+          <a:solidFill>
+            <a:srgbClr val="FFFFFF"/>
+          </a:solidFill>
+          <a:ln w="12700">
+            <a:solidFill>
+              <a:srgbClr val="0D9488"/>
             </a:solidFill>
             <a:prstDash val="solid"/>
           </a:ln>
@@ -30821,63 +30954,75 @@
         </p:nvSpPr>
         <p:spPr>
           <a:xfrm>
-            <a:off x="365760" y="3273552"/>
-            <a:ext cx="1371600" cy="658368"/>
-          </a:xfrm>
-          <a:prstGeom prst="rect">
-            <a:avLst/>
-          </a:prstGeom>
-          <a:noFill/>
-          <a:ln/>
-        </p:spPr>
-        <p:txBody>
-          <a:bodyPr wrap="square" lIns="0" tIns="0" rIns="0" bIns="0" rtlCol="0" anchor="ctr"/>
-          <a:lstStyle/>
-          <a:p>
-            <a:pPr algn="ctr" indent="0" marL="0">
-              <a:buNone/>
-            </a:pPr>
-            <a:r>
-              <a:rPr lang="en-US" sz="1100" b="1" dirty="0">
-                <a:solidFill>
-                  <a:srgbClr val="475569"/>
+            <a:off x="2313432" y="3364992"/>
+            <a:ext cx="1645920" cy="475488"/>
+          </a:xfrm>
+          <a:prstGeom prst="rect">
+            <a:avLst/>
+          </a:prstGeom>
+          <a:noFill/>
+          <a:ln/>
+        </p:spPr>
+        <p:txBody>
+          <a:bodyPr wrap="square" lIns="0" tIns="0" rIns="0" bIns="0" rtlCol="0" anchor="ctr"/>
+          <a:lstStyle/>
+          <a:p>
+            <a:pPr algn="ctr" indent="0" marL="0">
+              <a:buNone/>
+            </a:pPr>
+            <a:r>
+              <a:rPr lang="en-US" sz="1400" b="1" dirty="0">
+                <a:solidFill>
+                  <a:srgbClr val="0D9488"/>
                 </a:solidFill>
                 <a:latin typeface="Trebuchet MS" pitchFamily="34" charset="0"/>
                 <a:ea typeface="Trebuchet MS" pitchFamily="34" charset="-122"/>
                 <a:cs typeface="Trebuchet MS" pitchFamily="34" charset="-120"/>
               </a:rPr>
-              <a:t>Syllables</a:t>
-            </a:r>
-            <a:endParaRPr lang="en-US" sz="1100" dirty="0"/>
-          </a:p>
-        </p:txBody>
-      </p:sp>
-      <p:sp>
-        <p:nvSpPr>
-          <p:cNvPr id="27" name="Shape 25"/>
-          <p:cNvSpPr/>
-          <p:nvPr/>
-        </p:nvSpPr>
-        <p:spPr>
-          <a:xfrm>
-            <a:off x="1874520" y="3273552"/>
-            <a:ext cx="6903720" cy="658368"/>
-          </a:xfrm>
-          <a:prstGeom prst="rect">
-            <a:avLst>
-              <a:gd name="adj" fmla="val 8333"/>
-            </a:avLst>
-          </a:prstGeom>
-          <a:solidFill>
-            <a:srgbClr val="CCFBF1"/>
-          </a:solidFill>
-          <a:ln w="12700">
-            <a:solidFill>
-              <a:srgbClr val="0D9488"/>
-            </a:solidFill>
-            <a:prstDash val="solid"/>
-          </a:ln>
-        </p:spPr>
+              <a:t>re</a:t>
+            </a:r>
+            <a:endParaRPr lang="en-US" sz="1400" dirty="0"/>
+          </a:p>
+        </p:txBody>
+      </p:sp>
+      <p:sp>
+        <p:nvSpPr>
+          <p:cNvPr id="27" name="Text 25"/>
+          <p:cNvSpPr/>
+          <p:nvPr/>
+        </p:nvSpPr>
+        <p:spPr>
+          <a:xfrm>
+            <a:off x="3959352" y="3364992"/>
+            <a:ext cx="411480" cy="475488"/>
+          </a:xfrm>
+          <a:prstGeom prst="rect">
+            <a:avLst/>
+          </a:prstGeom>
+          <a:noFill/>
+          <a:ln/>
+        </p:spPr>
+        <p:txBody>
+          <a:bodyPr wrap="square" lIns="0" tIns="0" rIns="0" bIns="0" rtlCol="0" anchor="ctr"/>
+          <a:lstStyle/>
+          <a:p>
+            <a:pPr algn="ctr" indent="0" marL="0">
+              <a:buNone/>
+            </a:pPr>
+            <a:r>
+              <a:rPr lang="en-US" sz="1600" b="1" dirty="0">
+                <a:solidFill>
+                  <a:srgbClr val="0D9488"/>
+                </a:solidFill>
+                <a:latin typeface="Trebuchet MS" pitchFamily="34" charset="0"/>
+                <a:ea typeface="Trebuchet MS" pitchFamily="34" charset="-122"/>
+                <a:cs typeface="Trebuchet MS" pitchFamily="34" charset="-120"/>
+              </a:rPr>
+              <a:t>·</a:t>
+            </a:r>
+            <a:endParaRPr lang="en-US" sz="1600" dirty="0"/>
+          </a:p>
+        </p:txBody>
       </p:sp>
       <p:sp>
         <p:nvSpPr>
@@ -30887,8 +31032,8 @@
         </p:nvSpPr>
         <p:spPr>
           <a:xfrm>
-            <a:off x="1975104" y="3364992"/>
-            <a:ext cx="1554480" cy="475488"/>
+            <a:off x="4370832" y="3364992"/>
+            <a:ext cx="1645920" cy="475488"/>
           </a:xfrm>
           <a:prstGeom prst="rect">
             <a:avLst>
@@ -30914,8 +31059,8 @@
         </p:nvSpPr>
         <p:spPr>
           <a:xfrm>
-            <a:off x="1975104" y="3364992"/>
-            <a:ext cx="1554480" cy="475488"/>
+            <a:off x="4370832" y="3364992"/>
+            <a:ext cx="1645920" cy="475488"/>
           </a:xfrm>
           <a:prstGeom prst="rect">
             <a:avLst/>
@@ -30939,7 +31084,7 @@
                 <a:ea typeface="Trebuchet MS" pitchFamily="34" charset="-122"/>
                 <a:cs typeface="Trebuchet MS" pitchFamily="34" charset="-120"/>
               </a:rPr>
-              <a:t>a</a:t>
+              <a:t>al</a:t>
             </a:r>
             <a:endParaRPr lang="en-US" sz="1400" dirty="0"/>
           </a:p>
@@ -30953,8 +31098,8 @@
         </p:nvSpPr>
         <p:spPr>
           <a:xfrm>
-            <a:off x="3529584" y="3364992"/>
-            <a:ext cx="73152" cy="475488"/>
+            <a:off x="6016752" y="3364992"/>
+            <a:ext cx="411480" cy="475488"/>
           </a:xfrm>
           <a:prstGeom prst="rect">
             <a:avLst/>
@@ -30992,8 +31137,8 @@
         </p:nvSpPr>
         <p:spPr>
           <a:xfrm>
-            <a:off x="3602736" y="3364992"/>
-            <a:ext cx="1554480" cy="475488"/>
+            <a:off x="6428232" y="3364992"/>
+            <a:ext cx="1645920" cy="475488"/>
           </a:xfrm>
           <a:prstGeom prst="rect">
             <a:avLst>
@@ -31019,8 +31164,8 @@
         </p:nvSpPr>
         <p:spPr>
           <a:xfrm>
-            <a:off x="3602736" y="3364992"/>
-            <a:ext cx="1554480" cy="475488"/>
+            <a:off x="6428232" y="3364992"/>
+            <a:ext cx="1645920" cy="475488"/>
           </a:xfrm>
           <a:prstGeom prst="rect">
             <a:avLst/>
@@ -31044,7 +31189,7 @@
                 <a:ea typeface="Trebuchet MS" pitchFamily="34" charset="-122"/>
                 <a:cs typeface="Trebuchet MS" pitchFamily="34" charset="-120"/>
               </a:rPr>
-              <a:t>pol</a:t>
+              <a:t>ise</a:t>
             </a:r>
             <a:endParaRPr lang="en-US" sz="1400" dirty="0"/>
           </a:p>
@@ -31052,224 +31197,80 @@
       </p:sp>
       <p:sp>
         <p:nvSpPr>
-          <p:cNvPr id="33" name="Text 31"/>
-          <p:cNvSpPr/>
-          <p:nvPr/>
-        </p:nvSpPr>
-        <p:spPr>
-          <a:xfrm>
-            <a:off x="5157216" y="3364992"/>
-            <a:ext cx="73152" cy="475488"/>
-          </a:xfrm>
-          <a:prstGeom prst="rect">
-            <a:avLst/>
-          </a:prstGeom>
-          <a:noFill/>
-          <a:ln/>
-        </p:spPr>
-        <p:txBody>
-          <a:bodyPr wrap="square" lIns="0" tIns="0" rIns="0" bIns="0" rtlCol="0" anchor="ctr"/>
-          <a:lstStyle/>
-          <a:p>
-            <a:pPr algn="ctr" indent="0" marL="0">
-              <a:buNone/>
-            </a:pPr>
-            <a:r>
-              <a:rPr lang="en-US" sz="1600" b="1" dirty="0">
-                <a:solidFill>
-                  <a:srgbClr val="0D9488"/>
+          <p:cNvPr id="33" name="Shape 31"/>
+          <p:cNvSpPr/>
+          <p:nvPr/>
+        </p:nvSpPr>
+        <p:spPr>
+          <a:xfrm>
+            <a:off x="365760" y="4096512"/>
+            <a:ext cx="1371600" cy="804672"/>
+          </a:xfrm>
+          <a:prstGeom prst="rect">
+            <a:avLst>
+              <a:gd name="adj" fmla="val 6818"/>
+            </a:avLst>
+          </a:prstGeom>
+          <a:solidFill>
+            <a:srgbClr val="E2E8F0"/>
+          </a:solidFill>
+          <a:ln w="12700">
+            <a:solidFill>
+              <a:srgbClr val="E2E8F0"/>
+            </a:solidFill>
+            <a:prstDash val="solid"/>
+          </a:ln>
+        </p:spPr>
+      </p:sp>
+      <p:sp>
+        <p:nvSpPr>
+          <p:cNvPr id="34" name="Text 32"/>
+          <p:cNvSpPr/>
+          <p:nvPr/>
+        </p:nvSpPr>
+        <p:spPr>
+          <a:xfrm>
+            <a:off x="365760" y="4096512"/>
+            <a:ext cx="1371600" cy="804672"/>
+          </a:xfrm>
+          <a:prstGeom prst="rect">
+            <a:avLst/>
+          </a:prstGeom>
+          <a:noFill/>
+          <a:ln/>
+        </p:spPr>
+        <p:txBody>
+          <a:bodyPr wrap="square" lIns="0" tIns="0" rIns="0" bIns="0" rtlCol="0" anchor="ctr"/>
+          <a:lstStyle/>
+          <a:p>
+            <a:pPr algn="ctr" indent="0" marL="0">
+              <a:buNone/>
+            </a:pPr>
+            <a:r>
+              <a:rPr lang="en-US" sz="1100" b="1" dirty="0">
+                <a:solidFill>
+                  <a:srgbClr val="475569"/>
                 </a:solidFill>
                 <a:latin typeface="Trebuchet MS" pitchFamily="34" charset="0"/>
                 <a:ea typeface="Trebuchet MS" pitchFamily="34" charset="-122"/>
                 <a:cs typeface="Trebuchet MS" pitchFamily="34" charset="-120"/>
               </a:rPr>
-              <a:t>·</a:t>
-            </a:r>
-            <a:endParaRPr lang="en-US" sz="1600" dirty="0"/>
-          </a:p>
-        </p:txBody>
-      </p:sp>
-      <p:sp>
-        <p:nvSpPr>
-          <p:cNvPr id="34" name="Shape 32"/>
-          <p:cNvSpPr/>
-          <p:nvPr/>
-        </p:nvSpPr>
-        <p:spPr>
-          <a:xfrm>
-            <a:off x="5230368" y="3364992"/>
-            <a:ext cx="1554480" cy="475488"/>
-          </a:xfrm>
-          <a:prstGeom prst="rect">
-            <a:avLst>
-              <a:gd name="adj" fmla="val 9615"/>
-            </a:avLst>
-          </a:prstGeom>
-          <a:solidFill>
-            <a:srgbClr val="FFFFFF"/>
-          </a:solidFill>
-          <a:ln w="12700">
-            <a:solidFill>
-              <a:srgbClr val="0D9488"/>
-            </a:solidFill>
-            <a:prstDash val="solid"/>
-          </a:ln>
-        </p:spPr>
-      </p:sp>
-      <p:sp>
-        <p:nvSpPr>
-          <p:cNvPr id="35" name="Text 33"/>
-          <p:cNvSpPr/>
-          <p:nvPr/>
-        </p:nvSpPr>
-        <p:spPr>
-          <a:xfrm>
-            <a:off x="5230368" y="3364992"/>
-            <a:ext cx="1554480" cy="475488"/>
-          </a:xfrm>
-          <a:prstGeom prst="rect">
-            <a:avLst/>
-          </a:prstGeom>
-          <a:noFill/>
-          <a:ln/>
-        </p:spPr>
-        <p:txBody>
-          <a:bodyPr wrap="square" lIns="0" tIns="0" rIns="0" bIns="0" rtlCol="0" anchor="ctr"/>
-          <a:lstStyle/>
-          <a:p>
-            <a:pPr algn="ctr" indent="0" marL="0">
-              <a:buNone/>
-            </a:pPr>
-            <a:r>
-              <a:rPr lang="en-US" sz="1400" b="1" dirty="0">
-                <a:solidFill>
-                  <a:srgbClr val="0D9488"/>
-                </a:solidFill>
-                <a:latin typeface="Trebuchet MS" pitchFamily="34" charset="0"/>
-                <a:ea typeface="Trebuchet MS" pitchFamily="34" charset="-122"/>
-                <a:cs typeface="Trebuchet MS" pitchFamily="34" charset="-120"/>
-              </a:rPr>
-              <a:t>o</a:t>
-            </a:r>
-            <a:endParaRPr lang="en-US" sz="1400" dirty="0"/>
-          </a:p>
-        </p:txBody>
-      </p:sp>
-      <p:sp>
-        <p:nvSpPr>
-          <p:cNvPr id="36" name="Text 34"/>
-          <p:cNvSpPr/>
-          <p:nvPr/>
-        </p:nvSpPr>
-        <p:spPr>
-          <a:xfrm>
-            <a:off x="6784848" y="3364992"/>
-            <a:ext cx="73152" cy="475488"/>
-          </a:xfrm>
-          <a:prstGeom prst="rect">
-            <a:avLst/>
-          </a:prstGeom>
-          <a:noFill/>
-          <a:ln/>
-        </p:spPr>
-        <p:txBody>
-          <a:bodyPr wrap="square" lIns="0" tIns="0" rIns="0" bIns="0" rtlCol="0" anchor="ctr"/>
-          <a:lstStyle/>
-          <a:p>
-            <a:pPr algn="ctr" indent="0" marL="0">
-              <a:buNone/>
-            </a:pPr>
-            <a:r>
-              <a:rPr lang="en-US" sz="1600" b="1" dirty="0">
-                <a:solidFill>
-                  <a:srgbClr val="0D9488"/>
-                </a:solidFill>
-                <a:latin typeface="Trebuchet MS" pitchFamily="34" charset="0"/>
-                <a:ea typeface="Trebuchet MS" pitchFamily="34" charset="-122"/>
-                <a:cs typeface="Trebuchet MS" pitchFamily="34" charset="-120"/>
-              </a:rPr>
-              <a:t>·</a:t>
-            </a:r>
-            <a:endParaRPr lang="en-US" sz="1600" dirty="0"/>
-          </a:p>
-        </p:txBody>
-      </p:sp>
-      <p:sp>
-        <p:nvSpPr>
-          <p:cNvPr id="37" name="Shape 35"/>
-          <p:cNvSpPr/>
-          <p:nvPr/>
-        </p:nvSpPr>
-        <p:spPr>
-          <a:xfrm>
-            <a:off x="6858000" y="3364992"/>
-            <a:ext cx="1554480" cy="475488"/>
-          </a:xfrm>
-          <a:prstGeom prst="rect">
-            <a:avLst>
-              <a:gd name="adj" fmla="val 9615"/>
-            </a:avLst>
-          </a:prstGeom>
-          <a:solidFill>
-            <a:srgbClr val="FFFFFF"/>
-          </a:solidFill>
-          <a:ln w="12700">
-            <a:solidFill>
-              <a:srgbClr val="0D9488"/>
-            </a:solidFill>
-            <a:prstDash val="solid"/>
-          </a:ln>
-        </p:spPr>
-      </p:sp>
-      <p:sp>
-        <p:nvSpPr>
-          <p:cNvPr id="38" name="Text 36"/>
-          <p:cNvSpPr/>
-          <p:nvPr/>
-        </p:nvSpPr>
-        <p:spPr>
-          <a:xfrm>
-            <a:off x="6858000" y="3364992"/>
-            <a:ext cx="1554480" cy="475488"/>
-          </a:xfrm>
-          <a:prstGeom prst="rect">
-            <a:avLst/>
-          </a:prstGeom>
-          <a:noFill/>
-          <a:ln/>
-        </p:spPr>
-        <p:txBody>
-          <a:bodyPr wrap="square" lIns="0" tIns="0" rIns="0" bIns="0" rtlCol="0" anchor="ctr"/>
-          <a:lstStyle/>
-          <a:p>
-            <a:pPr algn="ctr" indent="0" marL="0">
-              <a:buNone/>
-            </a:pPr>
-            <a:r>
-              <a:rPr lang="en-US" sz="1400" b="1" dirty="0">
-                <a:solidFill>
-                  <a:srgbClr val="0D9488"/>
-                </a:solidFill>
-                <a:latin typeface="Trebuchet MS" pitchFamily="34" charset="0"/>
-                <a:ea typeface="Trebuchet MS" pitchFamily="34" charset="-122"/>
-                <a:cs typeface="Trebuchet MS" pitchFamily="34" charset="-120"/>
-              </a:rPr>
-              <a:t>gise</a:t>
-            </a:r>
-            <a:endParaRPr lang="en-US" sz="1400" dirty="0"/>
-          </a:p>
-        </p:txBody>
-      </p:sp>
-      <p:sp>
-        <p:nvSpPr>
-          <p:cNvPr id="39" name="Shape 37"/>
-          <p:cNvSpPr/>
-          <p:nvPr/>
-        </p:nvSpPr>
-        <p:spPr>
-          <a:xfrm>
-            <a:off x="365760" y="4096512"/>
-            <a:ext cx="1371600" cy="804672"/>
+              <a:t>Phonemes</a:t>
+            </a:r>
+            <a:endParaRPr lang="en-US" sz="1100" dirty="0"/>
+          </a:p>
+        </p:txBody>
+      </p:sp>
+      <p:sp>
+        <p:nvSpPr>
+          <p:cNvPr id="35" name="Shape 33"/>
+          <p:cNvSpPr/>
+          <p:nvPr/>
+        </p:nvSpPr>
+        <p:spPr>
+          <a:xfrm>
+            <a:off x="1874520" y="4096512"/>
+            <a:ext cx="6903720" cy="804672"/>
           </a:xfrm>
           <a:prstGeom prst="rect">
             <a:avLst>
@@ -31277,85 +31278,19 @@
             </a:avLst>
           </a:prstGeom>
           <a:solidFill>
-            <a:srgbClr val="E2E8F0"/>
+            <a:srgbClr val="F8FAFC"/>
           </a:solidFill>
           <a:ln w="12700">
             <a:solidFill>
               <a:srgbClr val="E2E8F0"/>
             </a:solidFill>
-            <a:prstDash val="solid"/>
-          </a:ln>
-        </p:spPr>
-      </p:sp>
-      <p:sp>
-        <p:nvSpPr>
-          <p:cNvPr id="40" name="Text 38"/>
-          <p:cNvSpPr/>
-          <p:nvPr/>
-        </p:nvSpPr>
-        <p:spPr>
-          <a:xfrm>
-            <a:off x="365760" y="4096512"/>
-            <a:ext cx="1371600" cy="804672"/>
-          </a:xfrm>
-          <a:prstGeom prst="rect">
-            <a:avLst/>
-          </a:prstGeom>
-          <a:noFill/>
-          <a:ln/>
-        </p:spPr>
-        <p:txBody>
-          <a:bodyPr wrap="square" lIns="0" tIns="0" rIns="0" bIns="0" rtlCol="0" anchor="ctr"/>
-          <a:lstStyle/>
-          <a:p>
-            <a:pPr algn="ctr" indent="0" marL="0">
-              <a:buNone/>
-            </a:pPr>
-            <a:r>
-              <a:rPr lang="en-US" sz="1100" b="1" dirty="0">
-                <a:solidFill>
-                  <a:srgbClr val="475569"/>
-                </a:solidFill>
-                <a:latin typeface="Trebuchet MS" pitchFamily="34" charset="0"/>
-                <a:ea typeface="Trebuchet MS" pitchFamily="34" charset="-122"/>
-                <a:cs typeface="Trebuchet MS" pitchFamily="34" charset="-120"/>
-              </a:rPr>
-              <a:t>Phonemes</a:t>
-            </a:r>
-            <a:endParaRPr lang="en-US" sz="1100" dirty="0"/>
-          </a:p>
-        </p:txBody>
-      </p:sp>
-      <p:sp>
-        <p:nvSpPr>
-          <p:cNvPr id="41" name="Shape 39"/>
-          <p:cNvSpPr/>
-          <p:nvPr/>
-        </p:nvSpPr>
-        <p:spPr>
-          <a:xfrm>
-            <a:off x="1874520" y="4096512"/>
-            <a:ext cx="6903720" cy="804672"/>
-          </a:xfrm>
-          <a:prstGeom prst="rect">
-            <a:avLst>
-              <a:gd name="adj" fmla="val 6818"/>
-            </a:avLst>
-          </a:prstGeom>
-          <a:solidFill>
-            <a:srgbClr val="F8FAFC"/>
-          </a:solidFill>
-          <a:ln w="12700">
-            <a:solidFill>
-              <a:srgbClr val="E2E8F0"/>
-            </a:solidFill>
             <a:prstDash val="dash"/>
           </a:ln>
         </p:spPr>
       </p:sp>
       <p:sp>
         <p:nvSpPr>
-          <p:cNvPr id="42" name="Text 40"/>
+          <p:cNvPr id="36" name="Text 34"/>
           <p:cNvSpPr/>
           <p:nvPr/>
         </p:nvSpPr>
@@ -31817,7 +31752,7 @@
                 <a:ea typeface="Trebuchet MS" pitchFamily="34" charset="-122"/>
                 <a:cs typeface="Trebuchet MS" pitchFamily="34" charset="-120"/>
               </a:rPr>
-              <a:t>apologise</a:t>
+              <a:t>realise</a:t>
             </a:r>
             <a:endParaRPr lang="en-US" sz="2800" dirty="0"/>
           </a:p>
@@ -31897,7 +31832,7 @@
         </p:nvSpPr>
         <p:spPr>
           <a:xfrm>
-            <a:off x="2221992" y="2258568"/>
+            <a:off x="2938272" y="2258568"/>
             <a:ext cx="1828800" cy="292608"/>
           </a:xfrm>
           <a:prstGeom prst="rect">
@@ -31931,7 +31866,7 @@
         </p:nvSpPr>
         <p:spPr>
           <a:xfrm>
-            <a:off x="2221992" y="2258568"/>
+            <a:off x="2938272" y="2258568"/>
             <a:ext cx="1828800" cy="292608"/>
           </a:xfrm>
           <a:prstGeom prst="rect">
@@ -31956,7 +31891,7 @@
                 <a:ea typeface="Trebuchet MS" pitchFamily="34" charset="-122"/>
                 <a:cs typeface="Trebuchet MS" pitchFamily="34" charset="-120"/>
               </a:rPr>
-              <a:t>apo</a:t>
+              <a:t>real</a:t>
             </a:r>
             <a:endParaRPr lang="en-US" sz="1300" dirty="0"/>
           </a:p>
@@ -31970,7 +31905,7 @@
         </p:nvSpPr>
         <p:spPr>
           <a:xfrm>
-            <a:off x="2221992" y="2569464"/>
+            <a:off x="2938272" y="2569464"/>
             <a:ext cx="1828800" cy="201168"/>
           </a:xfrm>
           <a:prstGeom prst="rect">
@@ -31995,7 +31930,7 @@
                 <a:ea typeface="Calibri" pitchFamily="34" charset="-122"/>
                 <a:cs typeface="Calibri" pitchFamily="34" charset="-120"/>
               </a:rPr>
-              <a:t>away from, off</a:t>
+              <a:t>actual, true</a:t>
             </a:r>
             <a:endParaRPr lang="en-US" sz="850" dirty="0"/>
           </a:p>
@@ -32009,7 +31944,7 @@
         </p:nvSpPr>
         <p:spPr>
           <a:xfrm>
-            <a:off x="4370832" y="2258568"/>
+            <a:off x="5803392" y="2258568"/>
             <a:ext cx="1828800" cy="292608"/>
           </a:xfrm>
           <a:prstGeom prst="rect">
@@ -32018,11 +31953,11 @@
             </a:avLst>
           </a:prstGeom>
           <a:solidFill>
-            <a:srgbClr val="FCE7F3"/>
+            <a:srgbClr val="CCFBF1"/>
           </a:solidFill>
           <a:ln w="19050">
             <a:solidFill>
-              <a:srgbClr val="DB2777"/>
+              <a:srgbClr val="0D9488"/>
             </a:solidFill>
             <a:prstDash val="solid"/>
           </a:ln>
@@ -32043,7 +31978,7 @@
         </p:nvSpPr>
         <p:spPr>
           <a:xfrm>
-            <a:off x="4370832" y="2258568"/>
+            <a:off x="5803392" y="2258568"/>
             <a:ext cx="1828800" cy="292608"/>
           </a:xfrm>
           <a:prstGeom prst="rect">
@@ -32062,13 +31997,13 @@
             <a:r>
               <a:rPr lang="en-US" sz="1300" b="1" dirty="0">
                 <a:solidFill>
-                  <a:srgbClr val="9D174D"/>
+                  <a:srgbClr val="0F766E"/>
                 </a:solidFill>
                 <a:latin typeface="Trebuchet MS" pitchFamily="34" charset="0"/>
                 <a:ea typeface="Trebuchet MS" pitchFamily="34" charset="-122"/>
                 <a:cs typeface="Trebuchet MS" pitchFamily="34" charset="-120"/>
               </a:rPr>
-              <a:t>log</a:t>
+              <a:t>ise</a:t>
             </a:r>
             <a:endParaRPr lang="en-US" sz="1300" dirty="0"/>
           </a:p>
@@ -32082,7 +32017,7 @@
         </p:nvSpPr>
         <p:spPr>
           <a:xfrm>
-            <a:off x="4370832" y="2569464"/>
+            <a:off x="5803392" y="2569464"/>
             <a:ext cx="1828800" cy="201168"/>
           </a:xfrm>
           <a:prstGeom prst="rect">
@@ -32107,7 +32042,7 @@
                 <a:ea typeface="Calibri" pitchFamily="34" charset="-122"/>
                 <a:cs typeface="Calibri" pitchFamily="34" charset="-120"/>
               </a:rPr>
-              <a:t>word, reason, speech</a:t>
+              <a:t>to make or become</a:t>
             </a:r>
             <a:endParaRPr lang="en-US" sz="850" dirty="0"/>
           </a:p>
@@ -32121,30 +32056,23 @@
         </p:nvSpPr>
         <p:spPr>
           <a:xfrm>
-            <a:off x="6519672" y="2258568"/>
-            <a:ext cx="1828800" cy="292608"/>
+            <a:off x="365760" y="3273552"/>
+            <a:ext cx="1371600" cy="658368"/>
           </a:xfrm>
           <a:prstGeom prst="rect">
             <a:avLst>
-              <a:gd name="adj" fmla="val 25000"/>
+              <a:gd name="adj" fmla="val 8333"/>
             </a:avLst>
           </a:prstGeom>
           <a:solidFill>
-            <a:srgbClr val="CCFBF1"/>
-          </a:solidFill>
-          <a:ln w="19050">
-            <a:solidFill>
-              <a:srgbClr val="0D9488"/>
-            </a:solidFill>
-            <a:prstDash val="solid"/>
-          </a:ln>
-          <a:effectLst>
-            <a:outerShdw sx="100000" sy="100000" kx="0" ky="0" algn="bl" rotWithShape="0" blurRad="101600" dist="38100" dir="8100000">
-              <a:srgbClr val="000000">
-                <a:alpha val="12000"/>
-              </a:srgbClr>
-            </a:outerShdw>
-          </a:effectLst>
+            <a:srgbClr val="E2E8F0"/>
+          </a:solidFill>
+          <a:ln w="12700">
+            <a:solidFill>
+              <a:srgbClr val="E2E8F0"/>
+            </a:solidFill>
+            <a:prstDash val="solid"/>
+          </a:ln>
         </p:spPr>
       </p:sp>
       <p:sp>
@@ -32155,47 +32083,773 @@
         </p:nvSpPr>
         <p:spPr>
           <a:xfrm>
-            <a:off x="6519672" y="2258568"/>
-            <a:ext cx="1828800" cy="292608"/>
-          </a:xfrm>
-          <a:prstGeom prst="rect">
-            <a:avLst/>
-          </a:prstGeom>
-          <a:noFill/>
-          <a:ln/>
-        </p:spPr>
-        <p:txBody>
-          <a:bodyPr wrap="square" lIns="0" tIns="0" rIns="0" bIns="0" rtlCol="0" anchor="ctr"/>
-          <a:lstStyle/>
-          <a:p>
-            <a:pPr algn="ctr" indent="0" marL="0">
-              <a:buNone/>
-            </a:pPr>
-            <a:r>
-              <a:rPr lang="en-US" sz="1300" b="1" dirty="0">
-                <a:solidFill>
-                  <a:srgbClr val="0F766E"/>
+            <a:off x="365760" y="3273552"/>
+            <a:ext cx="1371600" cy="658368"/>
+          </a:xfrm>
+          <a:prstGeom prst="rect">
+            <a:avLst/>
+          </a:prstGeom>
+          <a:noFill/>
+          <a:ln/>
+        </p:spPr>
+        <p:txBody>
+          <a:bodyPr wrap="square" lIns="0" tIns="0" rIns="0" bIns="0" rtlCol="0" anchor="ctr"/>
+          <a:lstStyle/>
+          <a:p>
+            <a:pPr algn="ctr" indent="0" marL="0">
+              <a:buNone/>
+            </a:pPr>
+            <a:r>
+              <a:rPr lang="en-US" sz="1100" b="1" dirty="0">
+                <a:solidFill>
+                  <a:srgbClr val="475569"/>
                 </a:solidFill>
                 <a:latin typeface="Trebuchet MS" pitchFamily="34" charset="0"/>
                 <a:ea typeface="Trebuchet MS" pitchFamily="34" charset="-122"/>
                 <a:cs typeface="Trebuchet MS" pitchFamily="34" charset="-120"/>
               </a:rPr>
+              <a:t>Syllables</a:t>
+            </a:r>
+            <a:endParaRPr lang="en-US" sz="1100" dirty="0"/>
+          </a:p>
+        </p:txBody>
+      </p:sp>
+      <p:sp>
+        <p:nvSpPr>
+          <p:cNvPr id="24" name="Shape 22"/>
+          <p:cNvSpPr/>
+          <p:nvPr/>
+        </p:nvSpPr>
+        <p:spPr>
+          <a:xfrm>
+            <a:off x="1874520" y="3273552"/>
+            <a:ext cx="6903720" cy="658368"/>
+          </a:xfrm>
+          <a:prstGeom prst="rect">
+            <a:avLst>
+              <a:gd name="adj" fmla="val 8333"/>
+            </a:avLst>
+          </a:prstGeom>
+          <a:solidFill>
+            <a:srgbClr val="CCFBF1"/>
+          </a:solidFill>
+          <a:ln w="12700">
+            <a:solidFill>
+              <a:srgbClr val="0D9488"/>
+            </a:solidFill>
+            <a:prstDash val="solid"/>
+          </a:ln>
+        </p:spPr>
+      </p:sp>
+      <p:sp>
+        <p:nvSpPr>
+          <p:cNvPr id="25" name="Shape 23"/>
+          <p:cNvSpPr/>
+          <p:nvPr/>
+        </p:nvSpPr>
+        <p:spPr>
+          <a:xfrm>
+            <a:off x="2313432" y="3364992"/>
+            <a:ext cx="1645920" cy="475488"/>
+          </a:xfrm>
+          <a:prstGeom prst="rect">
+            <a:avLst>
+              <a:gd name="adj" fmla="val 9615"/>
+            </a:avLst>
+          </a:prstGeom>
+          <a:solidFill>
+            <a:srgbClr val="FFFFFF"/>
+          </a:solidFill>
+          <a:ln w="12700">
+            <a:solidFill>
+              <a:srgbClr val="0D9488"/>
+            </a:solidFill>
+            <a:prstDash val="solid"/>
+          </a:ln>
+        </p:spPr>
+      </p:sp>
+      <p:sp>
+        <p:nvSpPr>
+          <p:cNvPr id="26" name="Text 24"/>
+          <p:cNvSpPr/>
+          <p:nvPr/>
+        </p:nvSpPr>
+        <p:spPr>
+          <a:xfrm>
+            <a:off x="2313432" y="3364992"/>
+            <a:ext cx="1645920" cy="475488"/>
+          </a:xfrm>
+          <a:prstGeom prst="rect">
+            <a:avLst/>
+          </a:prstGeom>
+          <a:noFill/>
+          <a:ln/>
+        </p:spPr>
+        <p:txBody>
+          <a:bodyPr wrap="square" lIns="0" tIns="0" rIns="0" bIns="0" rtlCol="0" anchor="ctr"/>
+          <a:lstStyle/>
+          <a:p>
+            <a:pPr algn="ctr" indent="0" marL="0">
+              <a:buNone/>
+            </a:pPr>
+            <a:r>
+              <a:rPr lang="en-US" sz="1400" b="1" dirty="0">
+                <a:solidFill>
+                  <a:srgbClr val="0D9488"/>
+                </a:solidFill>
+                <a:latin typeface="Trebuchet MS" pitchFamily="34" charset="0"/>
+                <a:ea typeface="Trebuchet MS" pitchFamily="34" charset="-122"/>
+                <a:cs typeface="Trebuchet MS" pitchFamily="34" charset="-120"/>
+              </a:rPr>
+              <a:t>re</a:t>
+            </a:r>
+            <a:endParaRPr lang="en-US" sz="1400" dirty="0"/>
+          </a:p>
+        </p:txBody>
+      </p:sp>
+      <p:sp>
+        <p:nvSpPr>
+          <p:cNvPr id="27" name="Text 25"/>
+          <p:cNvSpPr/>
+          <p:nvPr/>
+        </p:nvSpPr>
+        <p:spPr>
+          <a:xfrm>
+            <a:off x="3959352" y="3364992"/>
+            <a:ext cx="411480" cy="475488"/>
+          </a:xfrm>
+          <a:prstGeom prst="rect">
+            <a:avLst/>
+          </a:prstGeom>
+          <a:noFill/>
+          <a:ln/>
+        </p:spPr>
+        <p:txBody>
+          <a:bodyPr wrap="square" lIns="0" tIns="0" rIns="0" bIns="0" rtlCol="0" anchor="ctr"/>
+          <a:lstStyle/>
+          <a:p>
+            <a:pPr algn="ctr" indent="0" marL="0">
+              <a:buNone/>
+            </a:pPr>
+            <a:r>
+              <a:rPr lang="en-US" sz="1600" b="1" dirty="0">
+                <a:solidFill>
+                  <a:srgbClr val="0D9488"/>
+                </a:solidFill>
+                <a:latin typeface="Trebuchet MS" pitchFamily="34" charset="0"/>
+                <a:ea typeface="Trebuchet MS" pitchFamily="34" charset="-122"/>
+                <a:cs typeface="Trebuchet MS" pitchFamily="34" charset="-120"/>
+              </a:rPr>
+              <a:t>·</a:t>
+            </a:r>
+            <a:endParaRPr lang="en-US" sz="1600" dirty="0"/>
+          </a:p>
+        </p:txBody>
+      </p:sp>
+      <p:sp>
+        <p:nvSpPr>
+          <p:cNvPr id="28" name="Shape 26"/>
+          <p:cNvSpPr/>
+          <p:nvPr/>
+        </p:nvSpPr>
+        <p:spPr>
+          <a:xfrm>
+            <a:off x="4370832" y="3364992"/>
+            <a:ext cx="1645920" cy="475488"/>
+          </a:xfrm>
+          <a:prstGeom prst="rect">
+            <a:avLst>
+              <a:gd name="adj" fmla="val 9615"/>
+            </a:avLst>
+          </a:prstGeom>
+          <a:solidFill>
+            <a:srgbClr val="FFFFFF"/>
+          </a:solidFill>
+          <a:ln w="12700">
+            <a:solidFill>
+              <a:srgbClr val="0D9488"/>
+            </a:solidFill>
+            <a:prstDash val="solid"/>
+          </a:ln>
+        </p:spPr>
+      </p:sp>
+      <p:sp>
+        <p:nvSpPr>
+          <p:cNvPr id="29" name="Text 27"/>
+          <p:cNvSpPr/>
+          <p:nvPr/>
+        </p:nvSpPr>
+        <p:spPr>
+          <a:xfrm>
+            <a:off x="4370832" y="3364992"/>
+            <a:ext cx="1645920" cy="475488"/>
+          </a:xfrm>
+          <a:prstGeom prst="rect">
+            <a:avLst/>
+          </a:prstGeom>
+          <a:noFill/>
+          <a:ln/>
+        </p:spPr>
+        <p:txBody>
+          <a:bodyPr wrap="square" lIns="0" tIns="0" rIns="0" bIns="0" rtlCol="0" anchor="ctr"/>
+          <a:lstStyle/>
+          <a:p>
+            <a:pPr algn="ctr" indent="0" marL="0">
+              <a:buNone/>
+            </a:pPr>
+            <a:r>
+              <a:rPr lang="en-US" sz="1400" b="1" dirty="0">
+                <a:solidFill>
+                  <a:srgbClr val="0D9488"/>
+                </a:solidFill>
+                <a:latin typeface="Trebuchet MS" pitchFamily="34" charset="0"/>
+                <a:ea typeface="Trebuchet MS" pitchFamily="34" charset="-122"/>
+                <a:cs typeface="Trebuchet MS" pitchFamily="34" charset="-120"/>
+              </a:rPr>
+              <a:t>al</a:t>
+            </a:r>
+            <a:endParaRPr lang="en-US" sz="1400" dirty="0"/>
+          </a:p>
+        </p:txBody>
+      </p:sp>
+      <p:sp>
+        <p:nvSpPr>
+          <p:cNvPr id="30" name="Text 28"/>
+          <p:cNvSpPr/>
+          <p:nvPr/>
+        </p:nvSpPr>
+        <p:spPr>
+          <a:xfrm>
+            <a:off x="6016752" y="3364992"/>
+            <a:ext cx="411480" cy="475488"/>
+          </a:xfrm>
+          <a:prstGeom prst="rect">
+            <a:avLst/>
+          </a:prstGeom>
+          <a:noFill/>
+          <a:ln/>
+        </p:spPr>
+        <p:txBody>
+          <a:bodyPr wrap="square" lIns="0" tIns="0" rIns="0" bIns="0" rtlCol="0" anchor="ctr"/>
+          <a:lstStyle/>
+          <a:p>
+            <a:pPr algn="ctr" indent="0" marL="0">
+              <a:buNone/>
+            </a:pPr>
+            <a:r>
+              <a:rPr lang="en-US" sz="1600" b="1" dirty="0">
+                <a:solidFill>
+                  <a:srgbClr val="0D9488"/>
+                </a:solidFill>
+                <a:latin typeface="Trebuchet MS" pitchFamily="34" charset="0"/>
+                <a:ea typeface="Trebuchet MS" pitchFamily="34" charset="-122"/>
+                <a:cs typeface="Trebuchet MS" pitchFamily="34" charset="-120"/>
+              </a:rPr>
+              <a:t>·</a:t>
+            </a:r>
+            <a:endParaRPr lang="en-US" sz="1600" dirty="0"/>
+          </a:p>
+        </p:txBody>
+      </p:sp>
+      <p:sp>
+        <p:nvSpPr>
+          <p:cNvPr id="31" name="Shape 29"/>
+          <p:cNvSpPr/>
+          <p:nvPr/>
+        </p:nvSpPr>
+        <p:spPr>
+          <a:xfrm>
+            <a:off x="6428232" y="3364992"/>
+            <a:ext cx="1645920" cy="475488"/>
+          </a:xfrm>
+          <a:prstGeom prst="rect">
+            <a:avLst>
+              <a:gd name="adj" fmla="val 9615"/>
+            </a:avLst>
+          </a:prstGeom>
+          <a:solidFill>
+            <a:srgbClr val="FFFFFF"/>
+          </a:solidFill>
+          <a:ln w="12700">
+            <a:solidFill>
+              <a:srgbClr val="0D9488"/>
+            </a:solidFill>
+            <a:prstDash val="solid"/>
+          </a:ln>
+        </p:spPr>
+      </p:sp>
+      <p:sp>
+        <p:nvSpPr>
+          <p:cNvPr id="32" name="Text 30"/>
+          <p:cNvSpPr/>
+          <p:nvPr/>
+        </p:nvSpPr>
+        <p:spPr>
+          <a:xfrm>
+            <a:off x="6428232" y="3364992"/>
+            <a:ext cx="1645920" cy="475488"/>
+          </a:xfrm>
+          <a:prstGeom prst="rect">
+            <a:avLst/>
+          </a:prstGeom>
+          <a:noFill/>
+          <a:ln/>
+        </p:spPr>
+        <p:txBody>
+          <a:bodyPr wrap="square" lIns="0" tIns="0" rIns="0" bIns="0" rtlCol="0" anchor="ctr"/>
+          <a:lstStyle/>
+          <a:p>
+            <a:pPr algn="ctr" indent="0" marL="0">
+              <a:buNone/>
+            </a:pPr>
+            <a:r>
+              <a:rPr lang="en-US" sz="1400" b="1" dirty="0">
+                <a:solidFill>
+                  <a:srgbClr val="0D9488"/>
+                </a:solidFill>
+                <a:latin typeface="Trebuchet MS" pitchFamily="34" charset="0"/>
+                <a:ea typeface="Trebuchet MS" pitchFamily="34" charset="-122"/>
+                <a:cs typeface="Trebuchet MS" pitchFamily="34" charset="-120"/>
+              </a:rPr>
               <a:t>ise</a:t>
             </a:r>
-            <a:endParaRPr lang="en-US" sz="1300" dirty="0"/>
-          </a:p>
-        </p:txBody>
-      </p:sp>
-      <p:sp>
-        <p:nvSpPr>
-          <p:cNvPr id="24" name="Text 22"/>
-          <p:cNvSpPr/>
-          <p:nvPr/>
-        </p:nvSpPr>
-        <p:spPr>
-          <a:xfrm>
-            <a:off x="6519672" y="2569464"/>
-            <a:ext cx="1828800" cy="201168"/>
+            <a:endParaRPr lang="en-US" sz="1400" dirty="0"/>
+          </a:p>
+        </p:txBody>
+      </p:sp>
+      <p:sp>
+        <p:nvSpPr>
+          <p:cNvPr id="33" name="Shape 31"/>
+          <p:cNvSpPr/>
+          <p:nvPr/>
+        </p:nvSpPr>
+        <p:spPr>
+          <a:xfrm>
+            <a:off x="365760" y="4096512"/>
+            <a:ext cx="1371600" cy="804672"/>
+          </a:xfrm>
+          <a:prstGeom prst="rect">
+            <a:avLst>
+              <a:gd name="adj" fmla="val 6818"/>
+            </a:avLst>
+          </a:prstGeom>
+          <a:solidFill>
+            <a:srgbClr val="E2E8F0"/>
+          </a:solidFill>
+          <a:ln w="12700">
+            <a:solidFill>
+              <a:srgbClr val="E2E8F0"/>
+            </a:solidFill>
+            <a:prstDash val="solid"/>
+          </a:ln>
+        </p:spPr>
+      </p:sp>
+      <p:sp>
+        <p:nvSpPr>
+          <p:cNvPr id="34" name="Text 32"/>
+          <p:cNvSpPr/>
+          <p:nvPr/>
+        </p:nvSpPr>
+        <p:spPr>
+          <a:xfrm>
+            <a:off x="365760" y="4096512"/>
+            <a:ext cx="1371600" cy="804672"/>
+          </a:xfrm>
+          <a:prstGeom prst="rect">
+            <a:avLst/>
+          </a:prstGeom>
+          <a:noFill/>
+          <a:ln/>
+        </p:spPr>
+        <p:txBody>
+          <a:bodyPr wrap="square" lIns="0" tIns="0" rIns="0" bIns="0" rtlCol="0" anchor="ctr"/>
+          <a:lstStyle/>
+          <a:p>
+            <a:pPr algn="ctr" indent="0" marL="0">
+              <a:buNone/>
+            </a:pPr>
+            <a:r>
+              <a:rPr lang="en-US" sz="1100" b="1" dirty="0">
+                <a:solidFill>
+                  <a:srgbClr val="475569"/>
+                </a:solidFill>
+                <a:latin typeface="Trebuchet MS" pitchFamily="34" charset="0"/>
+                <a:ea typeface="Trebuchet MS" pitchFamily="34" charset="-122"/>
+                <a:cs typeface="Trebuchet MS" pitchFamily="34" charset="-120"/>
+              </a:rPr>
+              <a:t>Phonemes</a:t>
+            </a:r>
+            <a:endParaRPr lang="en-US" sz="1100" dirty="0"/>
+          </a:p>
+        </p:txBody>
+      </p:sp>
+      <p:sp>
+        <p:nvSpPr>
+          <p:cNvPr id="35" name="Shape 33"/>
+          <p:cNvSpPr/>
+          <p:nvPr/>
+        </p:nvSpPr>
+        <p:spPr>
+          <a:xfrm>
+            <a:off x="1874520" y="4096512"/>
+            <a:ext cx="6903720" cy="804672"/>
+          </a:xfrm>
+          <a:prstGeom prst="rect">
+            <a:avLst>
+              <a:gd name="adj" fmla="val 6818"/>
+            </a:avLst>
+          </a:prstGeom>
+          <a:solidFill>
+            <a:srgbClr val="FCE7F3"/>
+          </a:solidFill>
+          <a:ln w="12700">
+            <a:solidFill>
+              <a:srgbClr val="DB2777"/>
+            </a:solidFill>
+            <a:prstDash val="solid"/>
+          </a:ln>
+        </p:spPr>
+      </p:sp>
+      <p:sp>
+        <p:nvSpPr>
+          <p:cNvPr id="36" name="Shape 34"/>
+          <p:cNvSpPr/>
+          <p:nvPr/>
+        </p:nvSpPr>
+        <p:spPr>
+          <a:xfrm>
+            <a:off x="2427732" y="4169664"/>
+            <a:ext cx="685800" cy="384048"/>
+          </a:xfrm>
+          <a:prstGeom prst="rect">
+            <a:avLst>
+              <a:gd name="adj" fmla="val 9524"/>
+            </a:avLst>
+          </a:prstGeom>
+          <a:solidFill>
+            <a:srgbClr val="FFFFFF"/>
+          </a:solidFill>
+          <a:ln w="12700">
+            <a:solidFill>
+              <a:srgbClr val="DB2777"/>
+            </a:solidFill>
+            <a:prstDash val="solid"/>
+          </a:ln>
+        </p:spPr>
+      </p:sp>
+      <p:sp>
+        <p:nvSpPr>
+          <p:cNvPr id="37" name="Text 35"/>
+          <p:cNvSpPr/>
+          <p:nvPr/>
+        </p:nvSpPr>
+        <p:spPr>
+          <a:xfrm>
+            <a:off x="2427732" y="4169664"/>
+            <a:ext cx="685800" cy="384048"/>
+          </a:xfrm>
+          <a:prstGeom prst="rect">
+            <a:avLst/>
+          </a:prstGeom>
+          <a:noFill/>
+          <a:ln/>
+        </p:spPr>
+        <p:txBody>
+          <a:bodyPr wrap="square" lIns="0" tIns="0" rIns="0" bIns="0" rtlCol="0" anchor="ctr"/>
+          <a:lstStyle/>
+          <a:p>
+            <a:pPr algn="ctr" indent="0" marL="0">
+              <a:buNone/>
+            </a:pPr>
+            <a:r>
+              <a:rPr lang="en-US" sz="900" b="1" dirty="0">
+                <a:solidFill>
+                  <a:srgbClr val="9D174D"/>
+                </a:solidFill>
+                <a:latin typeface="Trebuchet MS" pitchFamily="34" charset="0"/>
+                <a:ea typeface="Trebuchet MS" pitchFamily="34" charset="-122"/>
+                <a:cs typeface="Trebuchet MS" pitchFamily="34" charset="-120"/>
+              </a:rPr>
+              <a:t>r</a:t>
+            </a:r>
+            <a:endParaRPr lang="en-US" sz="900" dirty="0"/>
+          </a:p>
+        </p:txBody>
+      </p:sp>
+      <p:sp>
+        <p:nvSpPr>
+          <p:cNvPr id="38" name="Shape 36"/>
+          <p:cNvSpPr/>
+          <p:nvPr/>
+        </p:nvSpPr>
+        <p:spPr>
+          <a:xfrm>
+            <a:off x="3639312" y="4169664"/>
+            <a:ext cx="685800" cy="384048"/>
+          </a:xfrm>
+          <a:prstGeom prst="rect">
+            <a:avLst>
+              <a:gd name="adj" fmla="val 9524"/>
+            </a:avLst>
+          </a:prstGeom>
+          <a:solidFill>
+            <a:srgbClr val="FFFFFF"/>
+          </a:solidFill>
+          <a:ln w="12700">
+            <a:solidFill>
+              <a:srgbClr val="DB2777"/>
+            </a:solidFill>
+            <a:prstDash val="solid"/>
+          </a:ln>
+        </p:spPr>
+      </p:sp>
+      <p:sp>
+        <p:nvSpPr>
+          <p:cNvPr id="39" name="Text 37"/>
+          <p:cNvSpPr/>
+          <p:nvPr/>
+        </p:nvSpPr>
+        <p:spPr>
+          <a:xfrm>
+            <a:off x="3639312" y="4169664"/>
+            <a:ext cx="685800" cy="384048"/>
+          </a:xfrm>
+          <a:prstGeom prst="rect">
+            <a:avLst/>
+          </a:prstGeom>
+          <a:noFill/>
+          <a:ln/>
+        </p:spPr>
+        <p:txBody>
+          <a:bodyPr wrap="square" lIns="0" tIns="0" rIns="0" bIns="0" rtlCol="0" anchor="ctr"/>
+          <a:lstStyle/>
+          <a:p>
+            <a:pPr algn="ctr" indent="0" marL="0">
+              <a:buNone/>
+            </a:pPr>
+            <a:r>
+              <a:rPr lang="en-US" sz="900" b="1" dirty="0">
+                <a:solidFill>
+                  <a:srgbClr val="9D174D"/>
+                </a:solidFill>
+                <a:latin typeface="Trebuchet MS" pitchFamily="34" charset="0"/>
+                <a:ea typeface="Trebuchet MS" pitchFamily="34" charset="-122"/>
+                <a:cs typeface="Trebuchet MS" pitchFamily="34" charset="-120"/>
+              </a:rPr>
+              <a:t>ea</a:t>
+            </a:r>
+            <a:endParaRPr lang="en-US" sz="900" dirty="0"/>
+          </a:p>
+        </p:txBody>
+      </p:sp>
+      <p:sp>
+        <p:nvSpPr>
+          <p:cNvPr id="40" name="Shape 38"/>
+          <p:cNvSpPr/>
+          <p:nvPr/>
+        </p:nvSpPr>
+        <p:spPr>
+          <a:xfrm>
+            <a:off x="4850892" y="4169664"/>
+            <a:ext cx="685800" cy="384048"/>
+          </a:xfrm>
+          <a:prstGeom prst="rect">
+            <a:avLst>
+              <a:gd name="adj" fmla="val 9524"/>
+            </a:avLst>
+          </a:prstGeom>
+          <a:solidFill>
+            <a:srgbClr val="FFFFFF"/>
+          </a:solidFill>
+          <a:ln w="12700">
+            <a:solidFill>
+              <a:srgbClr val="DB2777"/>
+            </a:solidFill>
+            <a:prstDash val="solid"/>
+          </a:ln>
+        </p:spPr>
+      </p:sp>
+      <p:sp>
+        <p:nvSpPr>
+          <p:cNvPr id="41" name="Text 39"/>
+          <p:cNvSpPr/>
+          <p:nvPr/>
+        </p:nvSpPr>
+        <p:spPr>
+          <a:xfrm>
+            <a:off x="4850892" y="4169664"/>
+            <a:ext cx="685800" cy="384048"/>
+          </a:xfrm>
+          <a:prstGeom prst="rect">
+            <a:avLst/>
+          </a:prstGeom>
+          <a:noFill/>
+          <a:ln/>
+        </p:spPr>
+        <p:txBody>
+          <a:bodyPr wrap="square" lIns="0" tIns="0" rIns="0" bIns="0" rtlCol="0" anchor="ctr"/>
+          <a:lstStyle/>
+          <a:p>
+            <a:pPr algn="ctr" indent="0" marL="0">
+              <a:buNone/>
+            </a:pPr>
+            <a:r>
+              <a:rPr lang="en-US" sz="900" b="1" dirty="0">
+                <a:solidFill>
+                  <a:srgbClr val="9D174D"/>
+                </a:solidFill>
+                <a:latin typeface="Trebuchet MS" pitchFamily="34" charset="0"/>
+                <a:ea typeface="Trebuchet MS" pitchFamily="34" charset="-122"/>
+                <a:cs typeface="Trebuchet MS" pitchFamily="34" charset="-120"/>
+              </a:rPr>
+              <a:t>l</a:t>
+            </a:r>
+            <a:endParaRPr lang="en-US" sz="900" dirty="0"/>
+          </a:p>
+        </p:txBody>
+      </p:sp>
+      <p:sp>
+        <p:nvSpPr>
+          <p:cNvPr id="42" name="Shape 40"/>
+          <p:cNvSpPr/>
+          <p:nvPr/>
+        </p:nvSpPr>
+        <p:spPr>
+          <a:xfrm>
+            <a:off x="6062472" y="4169664"/>
+            <a:ext cx="685800" cy="384048"/>
+          </a:xfrm>
+          <a:prstGeom prst="rect">
+            <a:avLst>
+              <a:gd name="adj" fmla="val 9524"/>
+            </a:avLst>
+          </a:prstGeom>
+          <a:solidFill>
+            <a:srgbClr val="FFFFFF"/>
+          </a:solidFill>
+          <a:ln w="12700">
+            <a:solidFill>
+              <a:srgbClr val="DB2777"/>
+            </a:solidFill>
+            <a:prstDash val="solid"/>
+          </a:ln>
+        </p:spPr>
+      </p:sp>
+      <p:sp>
+        <p:nvSpPr>
+          <p:cNvPr id="43" name="Text 41"/>
+          <p:cNvSpPr/>
+          <p:nvPr/>
+        </p:nvSpPr>
+        <p:spPr>
+          <a:xfrm>
+            <a:off x="6062472" y="4169664"/>
+            <a:ext cx="685800" cy="384048"/>
+          </a:xfrm>
+          <a:prstGeom prst="rect">
+            <a:avLst/>
+          </a:prstGeom>
+          <a:noFill/>
+          <a:ln/>
+        </p:spPr>
+        <p:txBody>
+          <a:bodyPr wrap="square" lIns="0" tIns="0" rIns="0" bIns="0" rtlCol="0" anchor="ctr"/>
+          <a:lstStyle/>
+          <a:p>
+            <a:pPr algn="ctr" indent="0" marL="0">
+              <a:buNone/>
+            </a:pPr>
+            <a:r>
+              <a:rPr lang="en-US" sz="900" b="1" dirty="0">
+                <a:solidFill>
+                  <a:srgbClr val="9D174D"/>
+                </a:solidFill>
+                <a:latin typeface="Trebuchet MS" pitchFamily="34" charset="0"/>
+                <a:ea typeface="Trebuchet MS" pitchFamily="34" charset="-122"/>
+                <a:cs typeface="Trebuchet MS" pitchFamily="34" charset="-120"/>
+              </a:rPr>
+              <a:t>i</a:t>
+            </a:r>
+            <a:endParaRPr lang="en-US" sz="900" dirty="0"/>
+          </a:p>
+        </p:txBody>
+      </p:sp>
+      <p:sp>
+        <p:nvSpPr>
+          <p:cNvPr id="44" name="Shape 42"/>
+          <p:cNvSpPr/>
+          <p:nvPr/>
+        </p:nvSpPr>
+        <p:spPr>
+          <a:xfrm>
+            <a:off x="7274052" y="4169664"/>
+            <a:ext cx="685800" cy="384048"/>
+          </a:xfrm>
+          <a:prstGeom prst="rect">
+            <a:avLst>
+              <a:gd name="adj" fmla="val 9524"/>
+            </a:avLst>
+          </a:prstGeom>
+          <a:solidFill>
+            <a:srgbClr val="FFFFFF"/>
+          </a:solidFill>
+          <a:ln w="12700">
+            <a:solidFill>
+              <a:srgbClr val="DB2777"/>
+            </a:solidFill>
+            <a:prstDash val="solid"/>
+          </a:ln>
+        </p:spPr>
+      </p:sp>
+      <p:sp>
+        <p:nvSpPr>
+          <p:cNvPr id="45" name="Text 43"/>
+          <p:cNvSpPr/>
+          <p:nvPr/>
+        </p:nvSpPr>
+        <p:spPr>
+          <a:xfrm>
+            <a:off x="7274052" y="4169664"/>
+            <a:ext cx="685800" cy="384048"/>
+          </a:xfrm>
+          <a:prstGeom prst="rect">
+            <a:avLst/>
+          </a:prstGeom>
+          <a:noFill/>
+          <a:ln/>
+        </p:spPr>
+        <p:txBody>
+          <a:bodyPr wrap="square" lIns="0" tIns="0" rIns="0" bIns="0" rtlCol="0" anchor="ctr"/>
+          <a:lstStyle/>
+          <a:p>
+            <a:pPr algn="ctr" indent="0" marL="0">
+              <a:buNone/>
+            </a:pPr>
+            <a:r>
+              <a:rPr lang="en-US" sz="900" b="1" dirty="0">
+                <a:solidFill>
+                  <a:srgbClr val="9D174D"/>
+                </a:solidFill>
+                <a:latin typeface="Trebuchet MS" pitchFamily="34" charset="0"/>
+                <a:ea typeface="Trebuchet MS" pitchFamily="34" charset="-122"/>
+                <a:cs typeface="Trebuchet MS" pitchFamily="34" charset="-120"/>
+              </a:rPr>
+              <a:t>se</a:t>
+            </a:r>
+            <a:endParaRPr lang="en-US" sz="900" dirty="0"/>
+          </a:p>
+        </p:txBody>
+      </p:sp>
+      <p:sp>
+        <p:nvSpPr>
+          <p:cNvPr id="46" name="Text 44"/>
+          <p:cNvSpPr/>
+          <p:nvPr/>
+        </p:nvSpPr>
+        <p:spPr>
+          <a:xfrm>
+            <a:off x="7274052" y="4572000"/>
+            <a:ext cx="685800" cy="219456"/>
           </a:xfrm>
           <a:prstGeom prst="rect">
             <a:avLst/>
@@ -32211,1083 +32865,15 @@
               <a:buNone/>
             </a:pPr>
             <a:r>
-              <a:rPr lang="en-US" sz="850" dirty="0">
-                <a:solidFill>
-                  <a:srgbClr val="475569"/>
+              <a:rPr lang="en-US" sz="750" i="1" dirty="0">
+                <a:solidFill>
+                  <a:srgbClr val="94A3B8"/>
                 </a:solidFill>
                 <a:latin typeface="Calibri" pitchFamily="34" charset="0"/>
                 <a:ea typeface="Calibri" pitchFamily="34" charset="-122"/>
                 <a:cs typeface="Calibri" pitchFamily="34" charset="-120"/>
               </a:rPr>
-              <a:t>to make or become</a:t>
-            </a:r>
-            <a:endParaRPr lang="en-US" sz="850" dirty="0"/>
-          </a:p>
-        </p:txBody>
-      </p:sp>
-      <p:sp>
-        <p:nvSpPr>
-          <p:cNvPr id="25" name="Shape 23"/>
-          <p:cNvSpPr/>
-          <p:nvPr/>
-        </p:nvSpPr>
-        <p:spPr>
-          <a:xfrm>
-            <a:off x="365760" y="3273552"/>
-            <a:ext cx="1371600" cy="658368"/>
-          </a:xfrm>
-          <a:prstGeom prst="rect">
-            <a:avLst>
-              <a:gd name="adj" fmla="val 8333"/>
-            </a:avLst>
-          </a:prstGeom>
-          <a:solidFill>
-            <a:srgbClr val="E2E8F0"/>
-          </a:solidFill>
-          <a:ln w="12700">
-            <a:solidFill>
-              <a:srgbClr val="E2E8F0"/>
-            </a:solidFill>
-            <a:prstDash val="solid"/>
-          </a:ln>
-        </p:spPr>
-      </p:sp>
-      <p:sp>
-        <p:nvSpPr>
-          <p:cNvPr id="26" name="Text 24"/>
-          <p:cNvSpPr/>
-          <p:nvPr/>
-        </p:nvSpPr>
-        <p:spPr>
-          <a:xfrm>
-            <a:off x="365760" y="3273552"/>
-            <a:ext cx="1371600" cy="658368"/>
-          </a:xfrm>
-          <a:prstGeom prst="rect">
-            <a:avLst/>
-          </a:prstGeom>
-          <a:noFill/>
-          <a:ln/>
-        </p:spPr>
-        <p:txBody>
-          <a:bodyPr wrap="square" lIns="0" tIns="0" rIns="0" bIns="0" rtlCol="0" anchor="ctr"/>
-          <a:lstStyle/>
-          <a:p>
-            <a:pPr algn="ctr" indent="0" marL="0">
-              <a:buNone/>
-            </a:pPr>
-            <a:r>
-              <a:rPr lang="en-US" sz="1100" b="1" dirty="0">
-                <a:solidFill>
-                  <a:srgbClr val="475569"/>
-                </a:solidFill>
-                <a:latin typeface="Trebuchet MS" pitchFamily="34" charset="0"/>
-                <a:ea typeface="Trebuchet MS" pitchFamily="34" charset="-122"/>
-                <a:cs typeface="Trebuchet MS" pitchFamily="34" charset="-120"/>
-              </a:rPr>
-              <a:t>Syllables</a:t>
-            </a:r>
-            <a:endParaRPr lang="en-US" sz="1100" dirty="0"/>
-          </a:p>
-        </p:txBody>
-      </p:sp>
-      <p:sp>
-        <p:nvSpPr>
-          <p:cNvPr id="27" name="Shape 25"/>
-          <p:cNvSpPr/>
-          <p:nvPr/>
-        </p:nvSpPr>
-        <p:spPr>
-          <a:xfrm>
-            <a:off x="1874520" y="3273552"/>
-            <a:ext cx="6903720" cy="658368"/>
-          </a:xfrm>
-          <a:prstGeom prst="rect">
-            <a:avLst>
-              <a:gd name="adj" fmla="val 8333"/>
-            </a:avLst>
-          </a:prstGeom>
-          <a:solidFill>
-            <a:srgbClr val="CCFBF1"/>
-          </a:solidFill>
-          <a:ln w="12700">
-            <a:solidFill>
-              <a:srgbClr val="0D9488"/>
-            </a:solidFill>
-            <a:prstDash val="solid"/>
-          </a:ln>
-        </p:spPr>
-      </p:sp>
-      <p:sp>
-        <p:nvSpPr>
-          <p:cNvPr id="28" name="Shape 26"/>
-          <p:cNvSpPr/>
-          <p:nvPr/>
-        </p:nvSpPr>
-        <p:spPr>
-          <a:xfrm>
-            <a:off x="1975104" y="3364992"/>
-            <a:ext cx="1554480" cy="475488"/>
-          </a:xfrm>
-          <a:prstGeom prst="rect">
-            <a:avLst>
-              <a:gd name="adj" fmla="val 9615"/>
-            </a:avLst>
-          </a:prstGeom>
-          <a:solidFill>
-            <a:srgbClr val="FFFFFF"/>
-          </a:solidFill>
-          <a:ln w="12700">
-            <a:solidFill>
-              <a:srgbClr val="0D9488"/>
-            </a:solidFill>
-            <a:prstDash val="solid"/>
-          </a:ln>
-        </p:spPr>
-      </p:sp>
-      <p:sp>
-        <p:nvSpPr>
-          <p:cNvPr id="29" name="Text 27"/>
-          <p:cNvSpPr/>
-          <p:nvPr/>
-        </p:nvSpPr>
-        <p:spPr>
-          <a:xfrm>
-            <a:off x="1975104" y="3364992"/>
-            <a:ext cx="1554480" cy="475488"/>
-          </a:xfrm>
-          <a:prstGeom prst="rect">
-            <a:avLst/>
-          </a:prstGeom>
-          <a:noFill/>
-          <a:ln/>
-        </p:spPr>
-        <p:txBody>
-          <a:bodyPr wrap="square" lIns="0" tIns="0" rIns="0" bIns="0" rtlCol="0" anchor="ctr"/>
-          <a:lstStyle/>
-          <a:p>
-            <a:pPr algn="ctr" indent="0" marL="0">
-              <a:buNone/>
-            </a:pPr>
-            <a:r>
-              <a:rPr lang="en-US" sz="1400" b="1" dirty="0">
-                <a:solidFill>
-                  <a:srgbClr val="0D9488"/>
-                </a:solidFill>
-                <a:latin typeface="Trebuchet MS" pitchFamily="34" charset="0"/>
-                <a:ea typeface="Trebuchet MS" pitchFamily="34" charset="-122"/>
-                <a:cs typeface="Trebuchet MS" pitchFamily="34" charset="-120"/>
-              </a:rPr>
-              <a:t>a</a:t>
-            </a:r>
-            <a:endParaRPr lang="en-US" sz="1400" dirty="0"/>
-          </a:p>
-        </p:txBody>
-      </p:sp>
-      <p:sp>
-        <p:nvSpPr>
-          <p:cNvPr id="30" name="Text 28"/>
-          <p:cNvSpPr/>
-          <p:nvPr/>
-        </p:nvSpPr>
-        <p:spPr>
-          <a:xfrm>
-            <a:off x="3529584" y="3364992"/>
-            <a:ext cx="73152" cy="475488"/>
-          </a:xfrm>
-          <a:prstGeom prst="rect">
-            <a:avLst/>
-          </a:prstGeom>
-          <a:noFill/>
-          <a:ln/>
-        </p:spPr>
-        <p:txBody>
-          <a:bodyPr wrap="square" lIns="0" tIns="0" rIns="0" bIns="0" rtlCol="0" anchor="ctr"/>
-          <a:lstStyle/>
-          <a:p>
-            <a:pPr algn="ctr" indent="0" marL="0">
-              <a:buNone/>
-            </a:pPr>
-            <a:r>
-              <a:rPr lang="en-US" sz="1600" b="1" dirty="0">
-                <a:solidFill>
-                  <a:srgbClr val="0D9488"/>
-                </a:solidFill>
-                <a:latin typeface="Trebuchet MS" pitchFamily="34" charset="0"/>
-                <a:ea typeface="Trebuchet MS" pitchFamily="34" charset="-122"/>
-                <a:cs typeface="Trebuchet MS" pitchFamily="34" charset="-120"/>
-              </a:rPr>
-              <a:t>·</a:t>
-            </a:r>
-            <a:endParaRPr lang="en-US" sz="1600" dirty="0"/>
-          </a:p>
-        </p:txBody>
-      </p:sp>
-      <p:sp>
-        <p:nvSpPr>
-          <p:cNvPr id="31" name="Shape 29"/>
-          <p:cNvSpPr/>
-          <p:nvPr/>
-        </p:nvSpPr>
-        <p:spPr>
-          <a:xfrm>
-            <a:off x="3602736" y="3364992"/>
-            <a:ext cx="1554480" cy="475488"/>
-          </a:xfrm>
-          <a:prstGeom prst="rect">
-            <a:avLst>
-              <a:gd name="adj" fmla="val 9615"/>
-            </a:avLst>
-          </a:prstGeom>
-          <a:solidFill>
-            <a:srgbClr val="FFFFFF"/>
-          </a:solidFill>
-          <a:ln w="12700">
-            <a:solidFill>
-              <a:srgbClr val="0D9488"/>
-            </a:solidFill>
-            <a:prstDash val="solid"/>
-          </a:ln>
-        </p:spPr>
-      </p:sp>
-      <p:sp>
-        <p:nvSpPr>
-          <p:cNvPr id="32" name="Text 30"/>
-          <p:cNvSpPr/>
-          <p:nvPr/>
-        </p:nvSpPr>
-        <p:spPr>
-          <a:xfrm>
-            <a:off x="3602736" y="3364992"/>
-            <a:ext cx="1554480" cy="475488"/>
-          </a:xfrm>
-          <a:prstGeom prst="rect">
-            <a:avLst/>
-          </a:prstGeom>
-          <a:noFill/>
-          <a:ln/>
-        </p:spPr>
-        <p:txBody>
-          <a:bodyPr wrap="square" lIns="0" tIns="0" rIns="0" bIns="0" rtlCol="0" anchor="ctr"/>
-          <a:lstStyle/>
-          <a:p>
-            <a:pPr algn="ctr" indent="0" marL="0">
-              <a:buNone/>
-            </a:pPr>
-            <a:r>
-              <a:rPr lang="en-US" sz="1400" b="1" dirty="0">
-                <a:solidFill>
-                  <a:srgbClr val="0D9488"/>
-                </a:solidFill>
-                <a:latin typeface="Trebuchet MS" pitchFamily="34" charset="0"/>
-                <a:ea typeface="Trebuchet MS" pitchFamily="34" charset="-122"/>
-                <a:cs typeface="Trebuchet MS" pitchFamily="34" charset="-120"/>
-              </a:rPr>
-              <a:t>pol</a:t>
-            </a:r>
-            <a:endParaRPr lang="en-US" sz="1400" dirty="0"/>
-          </a:p>
-        </p:txBody>
-      </p:sp>
-      <p:sp>
-        <p:nvSpPr>
-          <p:cNvPr id="33" name="Text 31"/>
-          <p:cNvSpPr/>
-          <p:nvPr/>
-        </p:nvSpPr>
-        <p:spPr>
-          <a:xfrm>
-            <a:off x="5157216" y="3364992"/>
-            <a:ext cx="73152" cy="475488"/>
-          </a:xfrm>
-          <a:prstGeom prst="rect">
-            <a:avLst/>
-          </a:prstGeom>
-          <a:noFill/>
-          <a:ln/>
-        </p:spPr>
-        <p:txBody>
-          <a:bodyPr wrap="square" lIns="0" tIns="0" rIns="0" bIns="0" rtlCol="0" anchor="ctr"/>
-          <a:lstStyle/>
-          <a:p>
-            <a:pPr algn="ctr" indent="0" marL="0">
-              <a:buNone/>
-            </a:pPr>
-            <a:r>
-              <a:rPr lang="en-US" sz="1600" b="1" dirty="0">
-                <a:solidFill>
-                  <a:srgbClr val="0D9488"/>
-                </a:solidFill>
-                <a:latin typeface="Trebuchet MS" pitchFamily="34" charset="0"/>
-                <a:ea typeface="Trebuchet MS" pitchFamily="34" charset="-122"/>
-                <a:cs typeface="Trebuchet MS" pitchFamily="34" charset="-120"/>
-              </a:rPr>
-              <a:t>·</a:t>
-            </a:r>
-            <a:endParaRPr lang="en-US" sz="1600" dirty="0"/>
-          </a:p>
-        </p:txBody>
-      </p:sp>
-      <p:sp>
-        <p:nvSpPr>
-          <p:cNvPr id="34" name="Shape 32"/>
-          <p:cNvSpPr/>
-          <p:nvPr/>
-        </p:nvSpPr>
-        <p:spPr>
-          <a:xfrm>
-            <a:off x="5230368" y="3364992"/>
-            <a:ext cx="1554480" cy="475488"/>
-          </a:xfrm>
-          <a:prstGeom prst="rect">
-            <a:avLst>
-              <a:gd name="adj" fmla="val 9615"/>
-            </a:avLst>
-          </a:prstGeom>
-          <a:solidFill>
-            <a:srgbClr val="FFFFFF"/>
-          </a:solidFill>
-          <a:ln w="12700">
-            <a:solidFill>
-              <a:srgbClr val="0D9488"/>
-            </a:solidFill>
-            <a:prstDash val="solid"/>
-          </a:ln>
-        </p:spPr>
-      </p:sp>
-      <p:sp>
-        <p:nvSpPr>
-          <p:cNvPr id="35" name="Text 33"/>
-          <p:cNvSpPr/>
-          <p:nvPr/>
-        </p:nvSpPr>
-        <p:spPr>
-          <a:xfrm>
-            <a:off x="5230368" y="3364992"/>
-            <a:ext cx="1554480" cy="475488"/>
-          </a:xfrm>
-          <a:prstGeom prst="rect">
-            <a:avLst/>
-          </a:prstGeom>
-          <a:noFill/>
-          <a:ln/>
-        </p:spPr>
-        <p:txBody>
-          <a:bodyPr wrap="square" lIns="0" tIns="0" rIns="0" bIns="0" rtlCol="0" anchor="ctr"/>
-          <a:lstStyle/>
-          <a:p>
-            <a:pPr algn="ctr" indent="0" marL="0">
-              <a:buNone/>
-            </a:pPr>
-            <a:r>
-              <a:rPr lang="en-US" sz="1400" b="1" dirty="0">
-                <a:solidFill>
-                  <a:srgbClr val="0D9488"/>
-                </a:solidFill>
-                <a:latin typeface="Trebuchet MS" pitchFamily="34" charset="0"/>
-                <a:ea typeface="Trebuchet MS" pitchFamily="34" charset="-122"/>
-                <a:cs typeface="Trebuchet MS" pitchFamily="34" charset="-120"/>
-              </a:rPr>
-              <a:t>o</a:t>
-            </a:r>
-            <a:endParaRPr lang="en-US" sz="1400" dirty="0"/>
-          </a:p>
-        </p:txBody>
-      </p:sp>
-      <p:sp>
-        <p:nvSpPr>
-          <p:cNvPr id="36" name="Text 34"/>
-          <p:cNvSpPr/>
-          <p:nvPr/>
-        </p:nvSpPr>
-        <p:spPr>
-          <a:xfrm>
-            <a:off x="6784848" y="3364992"/>
-            <a:ext cx="73152" cy="475488"/>
-          </a:xfrm>
-          <a:prstGeom prst="rect">
-            <a:avLst/>
-          </a:prstGeom>
-          <a:noFill/>
-          <a:ln/>
-        </p:spPr>
-        <p:txBody>
-          <a:bodyPr wrap="square" lIns="0" tIns="0" rIns="0" bIns="0" rtlCol="0" anchor="ctr"/>
-          <a:lstStyle/>
-          <a:p>
-            <a:pPr algn="ctr" indent="0" marL="0">
-              <a:buNone/>
-            </a:pPr>
-            <a:r>
-              <a:rPr lang="en-US" sz="1600" b="1" dirty="0">
-                <a:solidFill>
-                  <a:srgbClr val="0D9488"/>
-                </a:solidFill>
-                <a:latin typeface="Trebuchet MS" pitchFamily="34" charset="0"/>
-                <a:ea typeface="Trebuchet MS" pitchFamily="34" charset="-122"/>
-                <a:cs typeface="Trebuchet MS" pitchFamily="34" charset="-120"/>
-              </a:rPr>
-              <a:t>·</a:t>
-            </a:r>
-            <a:endParaRPr lang="en-US" sz="1600" dirty="0"/>
-          </a:p>
-        </p:txBody>
-      </p:sp>
-      <p:sp>
-        <p:nvSpPr>
-          <p:cNvPr id="37" name="Shape 35"/>
-          <p:cNvSpPr/>
-          <p:nvPr/>
-        </p:nvSpPr>
-        <p:spPr>
-          <a:xfrm>
-            <a:off x="6858000" y="3364992"/>
-            <a:ext cx="1554480" cy="475488"/>
-          </a:xfrm>
-          <a:prstGeom prst="rect">
-            <a:avLst>
-              <a:gd name="adj" fmla="val 9615"/>
-            </a:avLst>
-          </a:prstGeom>
-          <a:solidFill>
-            <a:srgbClr val="FFFFFF"/>
-          </a:solidFill>
-          <a:ln w="12700">
-            <a:solidFill>
-              <a:srgbClr val="0D9488"/>
-            </a:solidFill>
-            <a:prstDash val="solid"/>
-          </a:ln>
-        </p:spPr>
-      </p:sp>
-      <p:sp>
-        <p:nvSpPr>
-          <p:cNvPr id="38" name="Text 36"/>
-          <p:cNvSpPr/>
-          <p:nvPr/>
-        </p:nvSpPr>
-        <p:spPr>
-          <a:xfrm>
-            <a:off x="6858000" y="3364992"/>
-            <a:ext cx="1554480" cy="475488"/>
-          </a:xfrm>
-          <a:prstGeom prst="rect">
-            <a:avLst/>
-          </a:prstGeom>
-          <a:noFill/>
-          <a:ln/>
-        </p:spPr>
-        <p:txBody>
-          <a:bodyPr wrap="square" lIns="0" tIns="0" rIns="0" bIns="0" rtlCol="0" anchor="ctr"/>
-          <a:lstStyle/>
-          <a:p>
-            <a:pPr algn="ctr" indent="0" marL="0">
-              <a:buNone/>
-            </a:pPr>
-            <a:r>
-              <a:rPr lang="en-US" sz="1400" b="1" dirty="0">
-                <a:solidFill>
-                  <a:srgbClr val="0D9488"/>
-                </a:solidFill>
-                <a:latin typeface="Trebuchet MS" pitchFamily="34" charset="0"/>
-                <a:ea typeface="Trebuchet MS" pitchFamily="34" charset="-122"/>
-                <a:cs typeface="Trebuchet MS" pitchFamily="34" charset="-120"/>
-              </a:rPr>
-              <a:t>gise</a:t>
-            </a:r>
-            <a:endParaRPr lang="en-US" sz="1400" dirty="0"/>
-          </a:p>
-        </p:txBody>
-      </p:sp>
-      <p:sp>
-        <p:nvSpPr>
-          <p:cNvPr id="39" name="Shape 37"/>
-          <p:cNvSpPr/>
-          <p:nvPr/>
-        </p:nvSpPr>
-        <p:spPr>
-          <a:xfrm>
-            <a:off x="365760" y="4096512"/>
-            <a:ext cx="1371600" cy="804672"/>
-          </a:xfrm>
-          <a:prstGeom prst="rect">
-            <a:avLst>
-              <a:gd name="adj" fmla="val 6818"/>
-            </a:avLst>
-          </a:prstGeom>
-          <a:solidFill>
-            <a:srgbClr val="E2E8F0"/>
-          </a:solidFill>
-          <a:ln w="12700">
-            <a:solidFill>
-              <a:srgbClr val="E2E8F0"/>
-            </a:solidFill>
-            <a:prstDash val="solid"/>
-          </a:ln>
-        </p:spPr>
-      </p:sp>
-      <p:sp>
-        <p:nvSpPr>
-          <p:cNvPr id="40" name="Text 38"/>
-          <p:cNvSpPr/>
-          <p:nvPr/>
-        </p:nvSpPr>
-        <p:spPr>
-          <a:xfrm>
-            <a:off x="365760" y="4096512"/>
-            <a:ext cx="1371600" cy="804672"/>
-          </a:xfrm>
-          <a:prstGeom prst="rect">
-            <a:avLst/>
-          </a:prstGeom>
-          <a:noFill/>
-          <a:ln/>
-        </p:spPr>
-        <p:txBody>
-          <a:bodyPr wrap="square" lIns="0" tIns="0" rIns="0" bIns="0" rtlCol="0" anchor="ctr"/>
-          <a:lstStyle/>
-          <a:p>
-            <a:pPr algn="ctr" indent="0" marL="0">
-              <a:buNone/>
-            </a:pPr>
-            <a:r>
-              <a:rPr lang="en-US" sz="1100" b="1" dirty="0">
-                <a:solidFill>
-                  <a:srgbClr val="475569"/>
-                </a:solidFill>
-                <a:latin typeface="Trebuchet MS" pitchFamily="34" charset="0"/>
-                <a:ea typeface="Trebuchet MS" pitchFamily="34" charset="-122"/>
-                <a:cs typeface="Trebuchet MS" pitchFamily="34" charset="-120"/>
-              </a:rPr>
-              <a:t>Phonemes</a:t>
-            </a:r>
-            <a:endParaRPr lang="en-US" sz="1100" dirty="0"/>
-          </a:p>
-        </p:txBody>
-      </p:sp>
-      <p:sp>
-        <p:nvSpPr>
-          <p:cNvPr id="41" name="Shape 39"/>
-          <p:cNvSpPr/>
-          <p:nvPr/>
-        </p:nvSpPr>
-        <p:spPr>
-          <a:xfrm>
-            <a:off x="1874520" y="4096512"/>
-            <a:ext cx="6903720" cy="804672"/>
-          </a:xfrm>
-          <a:prstGeom prst="rect">
-            <a:avLst>
-              <a:gd name="adj" fmla="val 6818"/>
-            </a:avLst>
-          </a:prstGeom>
-          <a:solidFill>
-            <a:srgbClr val="FCE7F3"/>
-          </a:solidFill>
-          <a:ln w="12700">
-            <a:solidFill>
-              <a:srgbClr val="DB2777"/>
-            </a:solidFill>
-            <a:prstDash val="solid"/>
-          </a:ln>
-        </p:spPr>
-      </p:sp>
-      <p:sp>
-        <p:nvSpPr>
-          <p:cNvPr id="42" name="Shape 40"/>
-          <p:cNvSpPr/>
-          <p:nvPr/>
-        </p:nvSpPr>
-        <p:spPr>
-          <a:xfrm>
-            <a:off x="2124837" y="4169664"/>
-            <a:ext cx="685800" cy="384048"/>
-          </a:xfrm>
-          <a:prstGeom prst="rect">
-            <a:avLst>
-              <a:gd name="adj" fmla="val 9524"/>
-            </a:avLst>
-          </a:prstGeom>
-          <a:solidFill>
-            <a:srgbClr val="FFFFFF"/>
-          </a:solidFill>
-          <a:ln w="12700">
-            <a:solidFill>
-              <a:srgbClr val="DB2777"/>
-            </a:solidFill>
-            <a:prstDash val="solid"/>
-          </a:ln>
-        </p:spPr>
-      </p:sp>
-      <p:sp>
-        <p:nvSpPr>
-          <p:cNvPr id="43" name="Text 41"/>
-          <p:cNvSpPr/>
-          <p:nvPr/>
-        </p:nvSpPr>
-        <p:spPr>
-          <a:xfrm>
-            <a:off x="2124837" y="4169664"/>
-            <a:ext cx="685800" cy="384048"/>
-          </a:xfrm>
-          <a:prstGeom prst="rect">
-            <a:avLst/>
-          </a:prstGeom>
-          <a:noFill/>
-          <a:ln/>
-        </p:spPr>
-        <p:txBody>
-          <a:bodyPr wrap="square" lIns="0" tIns="0" rIns="0" bIns="0" rtlCol="0" anchor="ctr"/>
-          <a:lstStyle/>
-          <a:p>
-            <a:pPr algn="ctr" indent="0" marL="0">
-              <a:buNone/>
-            </a:pPr>
-            <a:r>
-              <a:rPr lang="en-US" sz="900" b="1" dirty="0">
-                <a:solidFill>
-                  <a:srgbClr val="9D174D"/>
-                </a:solidFill>
-                <a:latin typeface="Trebuchet MS" pitchFamily="34" charset="0"/>
-                <a:ea typeface="Trebuchet MS" pitchFamily="34" charset="-122"/>
-                <a:cs typeface="Trebuchet MS" pitchFamily="34" charset="-120"/>
-              </a:rPr>
-              <a:t>a</a:t>
-            </a:r>
-            <a:endParaRPr lang="en-US" sz="900" dirty="0"/>
-          </a:p>
-        </p:txBody>
-      </p:sp>
-      <p:sp>
-        <p:nvSpPr>
-          <p:cNvPr id="44" name="Shape 42"/>
-          <p:cNvSpPr/>
-          <p:nvPr/>
-        </p:nvSpPr>
-        <p:spPr>
-          <a:xfrm>
-            <a:off x="3033522" y="4169664"/>
-            <a:ext cx="685800" cy="384048"/>
-          </a:xfrm>
-          <a:prstGeom prst="rect">
-            <a:avLst>
-              <a:gd name="adj" fmla="val 9524"/>
-            </a:avLst>
-          </a:prstGeom>
-          <a:solidFill>
-            <a:srgbClr val="FFFFFF"/>
-          </a:solidFill>
-          <a:ln w="12700">
-            <a:solidFill>
-              <a:srgbClr val="DB2777"/>
-            </a:solidFill>
-            <a:prstDash val="solid"/>
-          </a:ln>
-        </p:spPr>
-      </p:sp>
-      <p:sp>
-        <p:nvSpPr>
-          <p:cNvPr id="45" name="Text 43"/>
-          <p:cNvSpPr/>
-          <p:nvPr/>
-        </p:nvSpPr>
-        <p:spPr>
-          <a:xfrm>
-            <a:off x="3033522" y="4169664"/>
-            <a:ext cx="685800" cy="384048"/>
-          </a:xfrm>
-          <a:prstGeom prst="rect">
-            <a:avLst/>
-          </a:prstGeom>
-          <a:noFill/>
-          <a:ln/>
-        </p:spPr>
-        <p:txBody>
-          <a:bodyPr wrap="square" lIns="0" tIns="0" rIns="0" bIns="0" rtlCol="0" anchor="ctr"/>
-          <a:lstStyle/>
-          <a:p>
-            <a:pPr algn="ctr" indent="0" marL="0">
-              <a:buNone/>
-            </a:pPr>
-            <a:r>
-              <a:rPr lang="en-US" sz="900" b="1" dirty="0">
-                <a:solidFill>
-                  <a:srgbClr val="9D174D"/>
-                </a:solidFill>
-                <a:latin typeface="Trebuchet MS" pitchFamily="34" charset="0"/>
-                <a:ea typeface="Trebuchet MS" pitchFamily="34" charset="-122"/>
-                <a:cs typeface="Trebuchet MS" pitchFamily="34" charset="-120"/>
-              </a:rPr>
-              <a:t>p</a:t>
-            </a:r>
-            <a:endParaRPr lang="en-US" sz="900" dirty="0"/>
-          </a:p>
-        </p:txBody>
-      </p:sp>
-      <p:sp>
-        <p:nvSpPr>
-          <p:cNvPr id="46" name="Shape 44"/>
-          <p:cNvSpPr/>
-          <p:nvPr/>
-        </p:nvSpPr>
-        <p:spPr>
-          <a:xfrm>
-            <a:off x="3942207" y="4169664"/>
-            <a:ext cx="685800" cy="384048"/>
-          </a:xfrm>
-          <a:prstGeom prst="rect">
-            <a:avLst>
-              <a:gd name="adj" fmla="val 9524"/>
-            </a:avLst>
-          </a:prstGeom>
-          <a:solidFill>
-            <a:srgbClr val="FFFFFF"/>
-          </a:solidFill>
-          <a:ln w="12700">
-            <a:solidFill>
-              <a:srgbClr val="DB2777"/>
-            </a:solidFill>
-            <a:prstDash val="solid"/>
-          </a:ln>
-        </p:spPr>
-      </p:sp>
-      <p:sp>
-        <p:nvSpPr>
-          <p:cNvPr id="47" name="Text 45"/>
-          <p:cNvSpPr/>
-          <p:nvPr/>
-        </p:nvSpPr>
-        <p:spPr>
-          <a:xfrm>
-            <a:off x="3942207" y="4169664"/>
-            <a:ext cx="685800" cy="384048"/>
-          </a:xfrm>
-          <a:prstGeom prst="rect">
-            <a:avLst/>
-          </a:prstGeom>
-          <a:noFill/>
-          <a:ln/>
-        </p:spPr>
-        <p:txBody>
-          <a:bodyPr wrap="square" lIns="0" tIns="0" rIns="0" bIns="0" rtlCol="0" anchor="ctr"/>
-          <a:lstStyle/>
-          <a:p>
-            <a:pPr algn="ctr" indent="0" marL="0">
-              <a:buNone/>
-            </a:pPr>
-            <a:r>
-              <a:rPr lang="en-US" sz="900" b="1" dirty="0">
-                <a:solidFill>
-                  <a:srgbClr val="9D174D"/>
-                </a:solidFill>
-                <a:latin typeface="Trebuchet MS" pitchFamily="34" charset="0"/>
-                <a:ea typeface="Trebuchet MS" pitchFamily="34" charset="-122"/>
-                <a:cs typeface="Trebuchet MS" pitchFamily="34" charset="-120"/>
-              </a:rPr>
-              <a:t>o</a:t>
-            </a:r>
-            <a:endParaRPr lang="en-US" sz="900" dirty="0"/>
-          </a:p>
-        </p:txBody>
-      </p:sp>
-      <p:sp>
-        <p:nvSpPr>
-          <p:cNvPr id="48" name="Shape 46"/>
-          <p:cNvSpPr/>
-          <p:nvPr/>
-        </p:nvSpPr>
-        <p:spPr>
-          <a:xfrm>
-            <a:off x="4850892" y="4169664"/>
-            <a:ext cx="685800" cy="384048"/>
-          </a:xfrm>
-          <a:prstGeom prst="rect">
-            <a:avLst>
-              <a:gd name="adj" fmla="val 9524"/>
-            </a:avLst>
-          </a:prstGeom>
-          <a:solidFill>
-            <a:srgbClr val="FFFFFF"/>
-          </a:solidFill>
-          <a:ln w="12700">
-            <a:solidFill>
-              <a:srgbClr val="DB2777"/>
-            </a:solidFill>
-            <a:prstDash val="solid"/>
-          </a:ln>
-        </p:spPr>
-      </p:sp>
-      <p:sp>
-        <p:nvSpPr>
-          <p:cNvPr id="49" name="Text 47"/>
-          <p:cNvSpPr/>
-          <p:nvPr/>
-        </p:nvSpPr>
-        <p:spPr>
-          <a:xfrm>
-            <a:off x="4850892" y="4169664"/>
-            <a:ext cx="685800" cy="384048"/>
-          </a:xfrm>
-          <a:prstGeom prst="rect">
-            <a:avLst/>
-          </a:prstGeom>
-          <a:noFill/>
-          <a:ln/>
-        </p:spPr>
-        <p:txBody>
-          <a:bodyPr wrap="square" lIns="0" tIns="0" rIns="0" bIns="0" rtlCol="0" anchor="ctr"/>
-          <a:lstStyle/>
-          <a:p>
-            <a:pPr algn="ctr" indent="0" marL="0">
-              <a:buNone/>
-            </a:pPr>
-            <a:r>
-              <a:rPr lang="en-US" sz="900" b="1" dirty="0">
-                <a:solidFill>
-                  <a:srgbClr val="9D174D"/>
-                </a:solidFill>
-                <a:latin typeface="Trebuchet MS" pitchFamily="34" charset="0"/>
-                <a:ea typeface="Trebuchet MS" pitchFamily="34" charset="-122"/>
-                <a:cs typeface="Trebuchet MS" pitchFamily="34" charset="-120"/>
-              </a:rPr>
-              <a:t>l</a:t>
-            </a:r>
-            <a:endParaRPr lang="en-US" sz="900" dirty="0"/>
-          </a:p>
-        </p:txBody>
-      </p:sp>
-      <p:sp>
-        <p:nvSpPr>
-          <p:cNvPr id="50" name="Shape 48"/>
-          <p:cNvSpPr/>
-          <p:nvPr/>
-        </p:nvSpPr>
-        <p:spPr>
-          <a:xfrm>
-            <a:off x="5759577" y="4169664"/>
-            <a:ext cx="685800" cy="384048"/>
-          </a:xfrm>
-          <a:prstGeom prst="rect">
-            <a:avLst>
-              <a:gd name="adj" fmla="val 9524"/>
-            </a:avLst>
-          </a:prstGeom>
-          <a:solidFill>
-            <a:srgbClr val="FFFFFF"/>
-          </a:solidFill>
-          <a:ln w="12700">
-            <a:solidFill>
-              <a:srgbClr val="DB2777"/>
-            </a:solidFill>
-            <a:prstDash val="solid"/>
-          </a:ln>
-        </p:spPr>
-      </p:sp>
-      <p:sp>
-        <p:nvSpPr>
-          <p:cNvPr id="51" name="Text 49"/>
-          <p:cNvSpPr/>
-          <p:nvPr/>
-        </p:nvSpPr>
-        <p:spPr>
-          <a:xfrm>
-            <a:off x="5759577" y="4169664"/>
-            <a:ext cx="685800" cy="384048"/>
-          </a:xfrm>
-          <a:prstGeom prst="rect">
-            <a:avLst/>
-          </a:prstGeom>
-          <a:noFill/>
-          <a:ln/>
-        </p:spPr>
-        <p:txBody>
-          <a:bodyPr wrap="square" lIns="0" tIns="0" rIns="0" bIns="0" rtlCol="0" anchor="ctr"/>
-          <a:lstStyle/>
-          <a:p>
-            <a:pPr algn="ctr" indent="0" marL="0">
-              <a:buNone/>
-            </a:pPr>
-            <a:r>
-              <a:rPr lang="en-US" sz="900" b="1" dirty="0">
-                <a:solidFill>
-                  <a:srgbClr val="9D174D"/>
-                </a:solidFill>
-                <a:latin typeface="Trebuchet MS" pitchFamily="34" charset="0"/>
-                <a:ea typeface="Trebuchet MS" pitchFamily="34" charset="-122"/>
-                <a:cs typeface="Trebuchet MS" pitchFamily="34" charset="-120"/>
-              </a:rPr>
-              <a:t>o</a:t>
-            </a:r>
-            <a:endParaRPr lang="en-US" sz="900" dirty="0"/>
-          </a:p>
-        </p:txBody>
-      </p:sp>
-      <p:sp>
-        <p:nvSpPr>
-          <p:cNvPr id="52" name="Shape 50"/>
-          <p:cNvSpPr/>
-          <p:nvPr/>
-        </p:nvSpPr>
-        <p:spPr>
-          <a:xfrm>
-            <a:off x="6668262" y="4169664"/>
-            <a:ext cx="685800" cy="384048"/>
-          </a:xfrm>
-          <a:prstGeom prst="rect">
-            <a:avLst>
-              <a:gd name="adj" fmla="val 9524"/>
-            </a:avLst>
-          </a:prstGeom>
-          <a:solidFill>
-            <a:srgbClr val="FFFFFF"/>
-          </a:solidFill>
-          <a:ln w="12700">
-            <a:solidFill>
-              <a:srgbClr val="DB2777"/>
-            </a:solidFill>
-            <a:prstDash val="solid"/>
-          </a:ln>
-        </p:spPr>
-      </p:sp>
-      <p:sp>
-        <p:nvSpPr>
-          <p:cNvPr id="53" name="Text 51"/>
-          <p:cNvSpPr/>
-          <p:nvPr/>
-        </p:nvSpPr>
-        <p:spPr>
-          <a:xfrm>
-            <a:off x="6668262" y="4169664"/>
-            <a:ext cx="685800" cy="384048"/>
-          </a:xfrm>
-          <a:prstGeom prst="rect">
-            <a:avLst/>
-          </a:prstGeom>
-          <a:noFill/>
-          <a:ln/>
-        </p:spPr>
-        <p:txBody>
-          <a:bodyPr wrap="square" lIns="0" tIns="0" rIns="0" bIns="0" rtlCol="0" anchor="ctr"/>
-          <a:lstStyle/>
-          <a:p>
-            <a:pPr algn="ctr" indent="0" marL="0">
-              <a:buNone/>
-            </a:pPr>
-            <a:r>
-              <a:rPr lang="en-US" sz="900" b="1" dirty="0">
-                <a:solidFill>
-                  <a:srgbClr val="9D174D"/>
-                </a:solidFill>
-                <a:latin typeface="Trebuchet MS" pitchFamily="34" charset="0"/>
-                <a:ea typeface="Trebuchet MS" pitchFamily="34" charset="-122"/>
-                <a:cs typeface="Trebuchet MS" pitchFamily="34" charset="-120"/>
-              </a:rPr>
-              <a:t>g</a:t>
-            </a:r>
-            <a:endParaRPr lang="en-US" sz="900" dirty="0"/>
-          </a:p>
-        </p:txBody>
-      </p:sp>
-      <p:sp>
-        <p:nvSpPr>
-          <p:cNvPr id="54" name="Shape 52"/>
-          <p:cNvSpPr/>
-          <p:nvPr/>
-        </p:nvSpPr>
-        <p:spPr>
-          <a:xfrm>
-            <a:off x="7576947" y="4169664"/>
-            <a:ext cx="685800" cy="384048"/>
-          </a:xfrm>
-          <a:prstGeom prst="rect">
-            <a:avLst>
-              <a:gd name="adj" fmla="val 9524"/>
-            </a:avLst>
-          </a:prstGeom>
-          <a:solidFill>
-            <a:srgbClr val="FFFFFF"/>
-          </a:solidFill>
-          <a:ln w="12700">
-            <a:solidFill>
-              <a:srgbClr val="DB2777"/>
-            </a:solidFill>
-            <a:prstDash val="solid"/>
-          </a:ln>
-        </p:spPr>
-      </p:sp>
-      <p:sp>
-        <p:nvSpPr>
-          <p:cNvPr id="55" name="Text 53"/>
-          <p:cNvSpPr/>
-          <p:nvPr/>
-        </p:nvSpPr>
-        <p:spPr>
-          <a:xfrm>
-            <a:off x="7576947" y="4169664"/>
-            <a:ext cx="685800" cy="384048"/>
-          </a:xfrm>
-          <a:prstGeom prst="rect">
-            <a:avLst/>
-          </a:prstGeom>
-          <a:noFill/>
-          <a:ln/>
-        </p:spPr>
-        <p:txBody>
-          <a:bodyPr wrap="square" lIns="0" tIns="0" rIns="0" bIns="0" rtlCol="0" anchor="ctr"/>
-          <a:lstStyle/>
-          <a:p>
-            <a:pPr algn="ctr" indent="0" marL="0">
-              <a:buNone/>
-            </a:pPr>
-            <a:r>
-              <a:rPr lang="en-US" sz="900" b="1" dirty="0">
-                <a:solidFill>
-                  <a:srgbClr val="9D174D"/>
-                </a:solidFill>
-                <a:latin typeface="Trebuchet MS" pitchFamily="34" charset="0"/>
-                <a:ea typeface="Trebuchet MS" pitchFamily="34" charset="-122"/>
-                <a:cs typeface="Trebuchet MS" pitchFamily="34" charset="-120"/>
-              </a:rPr>
-              <a:t>ise</a:t>
-            </a:r>
-            <a:endParaRPr lang="en-US" sz="900" dirty="0"/>
-          </a:p>
-        </p:txBody>
-      </p:sp>
-      <p:sp>
-        <p:nvSpPr>
-          <p:cNvPr id="56" name="Text 54"/>
-          <p:cNvSpPr/>
-          <p:nvPr/>
-        </p:nvSpPr>
-        <p:spPr>
-          <a:xfrm>
-            <a:off x="7576947" y="4572000"/>
-            <a:ext cx="685800" cy="219456"/>
-          </a:xfrm>
-          <a:prstGeom prst="rect">
-            <a:avLst/>
-          </a:prstGeom>
-          <a:noFill/>
-          <a:ln/>
-        </p:spPr>
-        <p:txBody>
-          <a:bodyPr wrap="square" lIns="0" tIns="0" rIns="0" bIns="0" rtlCol="0" anchor="t"/>
-          <a:lstStyle/>
-          <a:p>
-            <a:pPr algn="ctr" indent="0" marL="0">
-              <a:buNone/>
-            </a:pPr>
-            <a:r>
-              <a:rPr lang="en-US" sz="750" i="1" dirty="0">
-                <a:solidFill>
-                  <a:srgbClr val="94A3B8"/>
-                </a:solidFill>
-                <a:latin typeface="Calibri" pitchFamily="34" charset="0"/>
-                <a:ea typeface="Calibri" pitchFamily="34" charset="-122"/>
-                <a:cs typeface="Calibri" pitchFamily="34" charset="-120"/>
-              </a:rPr>
-              <a:t>/ize/</a:t>
+              <a:t>/z/</a:t>
             </a:r>
             <a:endParaRPr lang="en-US" sz="750" dirty="0"/>
           </a:p>
@@ -35241,7 +34827,7 @@
                 <a:ea typeface="Trebuchet MS" pitchFamily="34" charset="-122"/>
                 <a:cs typeface="Trebuchet MS" pitchFamily="34" charset="-120"/>
               </a:rPr>
-              <a:t>over-</a:t>
+              <a:t>un-</a:t>
             </a:r>
             <a:endParaRPr lang="en-US" sz="1300" dirty="0"/>
           </a:p>
@@ -35394,7 +34980,7 @@
                 <a:ea typeface="Trebuchet MS" pitchFamily="34" charset="-122"/>
                 <a:cs typeface="Trebuchet MS" pitchFamily="34" charset="-120"/>
               </a:rPr>
-              <a:t>un-</a:t>
+              <a:t>over-</a:t>
             </a:r>
             <a:endParaRPr lang="en-US" sz="1300" dirty="0"/>
           </a:p>
@@ -35547,7 +35133,7 @@
                 <a:ea typeface="Trebuchet MS" pitchFamily="34" charset="-122"/>
                 <a:cs typeface="Trebuchet MS" pitchFamily="34" charset="-120"/>
               </a:rPr>
-              <a:t>mini-</a:t>
+              <a:t>dis-</a:t>
             </a:r>
             <a:endParaRPr lang="en-US" sz="1300" dirty="0"/>
           </a:p>
@@ -35700,7 +35286,7 @@
                 <a:ea typeface="Trebuchet MS" pitchFamily="34" charset="-122"/>
                 <a:cs typeface="Trebuchet MS" pitchFamily="34" charset="-120"/>
               </a:rPr>
-              <a:t>en-</a:t>
+              <a:t>de-</a:t>
             </a:r>
             <a:endParaRPr lang="en-US" sz="1300" dirty="0"/>
           </a:p>
@@ -35764,7 +35350,7 @@
                 <a:ea typeface="Trebuchet MS" pitchFamily="34" charset="-122"/>
                 <a:cs typeface="Trebuchet MS" pitchFamily="34" charset="-120"/>
               </a:rPr>
-              <a:t>terror</a:t>
+              <a:t>apolog</a:t>
             </a:r>
             <a:endParaRPr lang="en-US" sz="1300" dirty="0"/>
           </a:p>
@@ -35960,7 +35546,7 @@
                 <a:ea typeface="Trebuchet MS" pitchFamily="34" charset="-122"/>
                 <a:cs typeface="Trebuchet MS" pitchFamily="34" charset="-120"/>
               </a:rPr>
-              <a:t>realise</a:t>
+              <a:t>recognise</a:t>
             </a:r>
             <a:endParaRPr lang="en-US" sz="1200" dirty="0"/>
           </a:p>
@@ -36026,7 +35612,7 @@
                 <a:ea typeface="Trebuchet MS" pitchFamily="34" charset="-122"/>
                 <a:cs typeface="Trebuchet MS" pitchFamily="34" charset="-120"/>
               </a:rPr>
-              <a:t>summarise</a:t>
+              <a:t>realise</a:t>
             </a:r>
             <a:endParaRPr lang="en-US" sz="1200" dirty="0"/>
           </a:p>
@@ -36092,7 +35678,7 @@
                 <a:ea typeface="Trebuchet MS" pitchFamily="34" charset="-122"/>
                 <a:cs typeface="Trebuchet MS" pitchFamily="34" charset="-120"/>
               </a:rPr>
-              <a:t>recognise</a:t>
+              <a:t>apologise</a:t>
             </a:r>
             <a:endParaRPr lang="en-US" sz="1200" dirty="0"/>
           </a:p>
@@ -36158,7 +35744,7 @@
                 <a:ea typeface="Trebuchet MS" pitchFamily="34" charset="-122"/>
                 <a:cs typeface="Trebuchet MS" pitchFamily="34" charset="-120"/>
               </a:rPr>
-              <a:t>terrorise</a:t>
+              <a:t>summarise</a:t>
             </a:r>
             <a:endParaRPr lang="en-US" sz="1200" dirty="0"/>
           </a:p>
@@ -36290,7 +35876,7 @@
                 <a:ea typeface="Trebuchet MS" pitchFamily="34" charset="-122"/>
                 <a:cs typeface="Trebuchet MS" pitchFamily="34" charset="-120"/>
               </a:rPr>
-              <a:t>apologise</a:t>
+              <a:t>memorise</a:t>
             </a:r>
             <a:endParaRPr lang="en-US" sz="1200" dirty="0"/>
           </a:p>
@@ -36356,7 +35942,7 @@
                 <a:ea typeface="Trebuchet MS" pitchFamily="34" charset="-122"/>
                 <a:cs typeface="Trebuchet MS" pitchFamily="34" charset="-120"/>
               </a:rPr>
-              <a:t>memorise</a:t>
+              <a:t>practise</a:t>
             </a:r>
             <a:endParaRPr lang="en-US" sz="1200" dirty="0"/>
           </a:p>
@@ -37140,7 +36726,7 @@
                 <a:ea typeface="Calibri" pitchFamily="34" charset="-122"/>
                 <a:cs typeface="Calibri" pitchFamily="34" charset="-120"/>
               </a:rPr>
-              <a:t>A meaningful word part added to the beginning of a root to change its meaning. E.g. 'un-' in 'realise' means 'not'.</a:t>
+              <a:t>A meaningful word part added to the beginning of a root to change its meaning. E.g. 'un-' in 'recognise' means 'not'.</a:t>
             </a:r>
             <a:endParaRPr lang="en-US" sz="1350" dirty="0"/>
           </a:p>
@@ -37544,7 +37130,7 @@
                 <a:ea typeface="Calibri" pitchFamily="34" charset="-122"/>
                 <a:cs typeface="Calibri" pitchFamily="34" charset="-120"/>
               </a:rPr>
-              <a:t>1.  The suffix '-ise' can turn a noun or adjective into a verb.</a:t>
+              <a:t>1.  The word 'organise' contains the suffix '-ise'.</a:t>
             </a:r>
             <a:endParaRPr lang="en-US" sz="1300" dirty="0"/>
           </a:p>
@@ -37683,7 +37269,7 @@
                 <a:ea typeface="Calibri" pitchFamily="34" charset="-122"/>
                 <a:cs typeface="Calibri" pitchFamily="34" charset="-120"/>
               </a:rPr>
-              <a:t>2.  The suffix '-ise' means 'without' or 'not'.</a:t>
+              <a:t>2.  The suffix '-ise' comes from Greek and means to make or become.</a:t>
             </a:r>
             <a:endParaRPr lang="en-US" sz="1300" dirty="0"/>
           </a:p>
@@ -37706,11 +37292,11 @@
             </a:avLst>
           </a:prstGeom>
           <a:solidFill>
-            <a:srgbClr val="FEE2E2"/>
-          </a:solidFill>
-          <a:ln w="12700">
-            <a:solidFill>
-              <a:srgbClr val="DC2626"/>
+            <a:srgbClr val="DCFCE7"/>
+          </a:solidFill>
+          <a:ln w="12700">
+            <a:solidFill>
+              <a:srgbClr val="16A34A"/>
             </a:solidFill>
             <a:prstDash val="solid"/>
           </a:ln>
@@ -37743,13 +37329,13 @@
             <a:r>
               <a:rPr lang="en-US" sz="1100" b="1" dirty="0">
                 <a:solidFill>
-                  <a:srgbClr val="DC2626"/>
+                  <a:srgbClr val="16A34A"/>
                 </a:solidFill>
                 <a:latin typeface="Trebuchet MS" pitchFamily="34" charset="0"/>
                 <a:ea typeface="Trebuchet MS" pitchFamily="34" charset="-122"/>
                 <a:cs typeface="Trebuchet MS" pitchFamily="34" charset="-120"/>
               </a:rPr>
-              <a:t>FALSE</a:t>
+              <a:t>TRUE</a:t>
             </a:r>
             <a:endParaRPr lang="en-US" sz="1100" dirty="0"/>
           </a:p>
@@ -37822,7 +37408,7 @@
                 <a:ea typeface="Calibri" pitchFamily="34" charset="-122"/>
                 <a:cs typeface="Calibri" pitchFamily="34" charset="-120"/>
               </a:rPr>
-              <a:t>3.  The word 'organise' contains the suffix '-ise'.</a:t>
+              <a:t>3.  The suffix '-ise' always goes at the beginning of a word.</a:t>
             </a:r>
             <a:endParaRPr lang="en-US" sz="1300" dirty="0"/>
           </a:p>
@@ -37845,11 +37431,11 @@
             </a:avLst>
           </a:prstGeom>
           <a:solidFill>
-            <a:srgbClr val="DCFCE7"/>
-          </a:solidFill>
-          <a:ln w="12700">
-            <a:solidFill>
-              <a:srgbClr val="16A34A"/>
+            <a:srgbClr val="FEE2E2"/>
+          </a:solidFill>
+          <a:ln w="12700">
+            <a:solidFill>
+              <a:srgbClr val="DC2626"/>
             </a:solidFill>
             <a:prstDash val="solid"/>
           </a:ln>
@@ -37882,13 +37468,13 @@
             <a:r>
               <a:rPr lang="en-US" sz="1100" b="1" dirty="0">
                 <a:solidFill>
-                  <a:srgbClr val="16A34A"/>
+                  <a:srgbClr val="DC2626"/>
                 </a:solidFill>
                 <a:latin typeface="Trebuchet MS" pitchFamily="34" charset="0"/>
                 <a:ea typeface="Trebuchet MS" pitchFamily="34" charset="-122"/>
                 <a:cs typeface="Trebuchet MS" pitchFamily="34" charset="-120"/>
               </a:rPr>
-              <a:t>TRUE</a:t>
+              <a:t>FALSE</a:t>
             </a:r>
             <a:endParaRPr lang="en-US" sz="1100" dirty="0"/>
           </a:p>
@@ -37961,7 +37547,7 @@
                 <a:ea typeface="Calibri" pitchFamily="34" charset="-122"/>
                 <a:cs typeface="Calibri" pitchFamily="34" charset="-120"/>
               </a:rPr>
-              <a:t>4.  Adding '-ise' to a base word makes it an action word (verb).</a:t>
+              <a:t>4.  The suffix '-ise' can turn a noun or adjective into a verb.</a:t>
             </a:r>
             <a:endParaRPr lang="en-US" sz="1300" dirty="0"/>
           </a:p>
@@ -38100,7 +37686,7 @@
                 <a:ea typeface="Calibri" pitchFamily="34" charset="-122"/>
                 <a:cs typeface="Calibri" pitchFamily="34" charset="-120"/>
               </a:rPr>
-              <a:t>5.  The suffix '-ise' always comes at the beginning of a word.</a:t>
+              <a:t>5.  Adding '-ise' to a base word always doubles the final consonant.</a:t>
             </a:r>
             <a:endParaRPr lang="en-US" sz="1300" dirty="0"/>
           </a:p>
@@ -38805,7 +38391,7 @@
                 <a:ea typeface="Trebuchet MS" pitchFamily="34" charset="-122"/>
                 <a:cs typeface="Trebuchet MS" pitchFamily="34" charset="-120"/>
               </a:rPr>
-              <a:t>realise</a:t>
+              <a:t>recognise</a:t>
             </a:r>
             <a:endParaRPr lang="en-US" sz="1300" dirty="0"/>
           </a:p>
@@ -38871,7 +38457,7 @@
                 <a:ea typeface="Trebuchet MS" pitchFamily="34" charset="-122"/>
                 <a:cs typeface="Trebuchet MS" pitchFamily="34" charset="-120"/>
               </a:rPr>
-              <a:t>summarise</a:t>
+              <a:t>realise</a:t>
             </a:r>
             <a:endParaRPr lang="en-US" sz="1300" dirty="0"/>
           </a:p>
@@ -38937,7 +38523,7 @@
                 <a:ea typeface="Trebuchet MS" pitchFamily="34" charset="-122"/>
                 <a:cs typeface="Trebuchet MS" pitchFamily="34" charset="-120"/>
               </a:rPr>
-              <a:t>recognise</a:t>
+              <a:t>apologise</a:t>
             </a:r>
             <a:endParaRPr lang="en-US" sz="1300" dirty="0"/>
           </a:p>
@@ -39003,7 +38589,7 @@
                 <a:ea typeface="Trebuchet MS" pitchFamily="34" charset="-122"/>
                 <a:cs typeface="Trebuchet MS" pitchFamily="34" charset="-120"/>
               </a:rPr>
-              <a:t>terrorise</a:t>
+              <a:t>summarise</a:t>
             </a:r>
             <a:endParaRPr lang="en-US" sz="1300" dirty="0"/>
           </a:p>
@@ -39135,7 +38721,7 @@
                 <a:ea typeface="Trebuchet MS" pitchFamily="34" charset="-122"/>
                 <a:cs typeface="Trebuchet MS" pitchFamily="34" charset="-120"/>
               </a:rPr>
-              <a:t>apologise</a:t>
+              <a:t>memorise</a:t>
             </a:r>
             <a:endParaRPr lang="en-US" sz="1300" dirty="0"/>
           </a:p>
@@ -39920,7 +39506,7 @@
                 <a:ea typeface="Trebuchet MS" pitchFamily="34" charset="-122"/>
                 <a:cs typeface="Trebuchet MS" pitchFamily="34" charset="-120"/>
               </a:rPr>
-              <a:t>over-</a:t>
+              <a:t>un-</a:t>
             </a:r>
             <a:endParaRPr lang="en-US" sz="1300" dirty="0"/>
           </a:p>
@@ -40073,7 +39659,7 @@
                 <a:ea typeface="Trebuchet MS" pitchFamily="34" charset="-122"/>
                 <a:cs typeface="Trebuchet MS" pitchFamily="34" charset="-120"/>
               </a:rPr>
-              <a:t>un-</a:t>
+              <a:t>over-</a:t>
             </a:r>
             <a:endParaRPr lang="en-US" sz="1300" dirty="0"/>
           </a:p>
@@ -40226,7 +39812,7 @@
                 <a:ea typeface="Trebuchet MS" pitchFamily="34" charset="-122"/>
                 <a:cs typeface="Trebuchet MS" pitchFamily="34" charset="-120"/>
               </a:rPr>
-              <a:t>mini-</a:t>
+              <a:t>dis-</a:t>
             </a:r>
             <a:endParaRPr lang="en-US" sz="1300" dirty="0"/>
           </a:p>
@@ -40379,7 +39965,7 @@
                 <a:ea typeface="Trebuchet MS" pitchFamily="34" charset="-122"/>
                 <a:cs typeface="Trebuchet MS" pitchFamily="34" charset="-120"/>
               </a:rPr>
-              <a:t>en-</a:t>
+              <a:t>de-</a:t>
             </a:r>
             <a:endParaRPr lang="en-US" sz="1300" dirty="0"/>
           </a:p>
@@ -40443,7 +40029,7 @@
                 <a:ea typeface="Trebuchet MS" pitchFamily="34" charset="-122"/>
                 <a:cs typeface="Trebuchet MS" pitchFamily="34" charset="-120"/>
               </a:rPr>
-              <a:t>terror</a:t>
+              <a:t>apolog</a:t>
             </a:r>
             <a:endParaRPr lang="en-US" sz="1300" dirty="0"/>
           </a:p>
@@ -41379,7 +40965,7 @@
                 <a:ea typeface="Calibri" pitchFamily="34" charset="-122"/>
                 <a:cs typeface="Calibri" pitchFamily="34" charset="-120"/>
               </a:rPr>
-              <a:t>To say sorry to someone because you did something wrong.</a:t>
+              <a:t>To learn something so well that you can remember it perfectly.</a:t>
             </a:r>
             <a:endParaRPr lang="en-US" sz="1200" dirty="0"/>
           </a:p>
@@ -41452,7 +41038,7 @@
                 <a:ea typeface="Trebuchet MS" pitchFamily="34" charset="-122"/>
                 <a:cs typeface="Trebuchet MS" pitchFamily="34" charset="-120"/>
               </a:rPr>
-              <a:t>realise</a:t>
+              <a:t>recognise</a:t>
             </a:r>
             <a:endParaRPr lang="en-US" sz="1200" dirty="0"/>
           </a:p>
@@ -41518,7 +41104,7 @@
                 <a:ea typeface="Calibri" pitchFamily="34" charset="-122"/>
                 <a:cs typeface="Calibri" pitchFamily="34" charset="-120"/>
               </a:rPr>
-              <a:t>To arrange things neatly so they are easy to find or use.</a:t>
+              <a:t>To arrange things in a neat and orderly way.</a:t>
             </a:r>
             <a:endParaRPr lang="en-US" sz="1200" dirty="0"/>
           </a:p>
@@ -41591,7 +41177,7 @@
                 <a:ea typeface="Trebuchet MS" pitchFamily="34" charset="-122"/>
                 <a:cs typeface="Trebuchet MS" pitchFamily="34" charset="-120"/>
               </a:rPr>
-              <a:t>summarise</a:t>
+              <a:t>realise</a:t>
             </a:r>
             <a:endParaRPr lang="en-US" sz="1200" dirty="0"/>
           </a:p>
@@ -41657,7 +41243,7 @@
                 <a:ea typeface="Calibri" pitchFamily="34" charset="-122"/>
                 <a:cs typeface="Calibri" pitchFamily="34" charset="-120"/>
               </a:rPr>
-              <a:t>To know who someone is or what something is because you have seen it before.</a:t>
+              <a:t>To say sorry for something you have done wrong.</a:t>
             </a:r>
             <a:endParaRPr lang="en-US" sz="1200" dirty="0"/>
           </a:p>
@@ -41730,7 +41316,7 @@
                 <a:ea typeface="Trebuchet MS" pitchFamily="34" charset="-122"/>
                 <a:cs typeface="Trebuchet MS" pitchFamily="34" charset="-120"/>
               </a:rPr>
-              <a:t>recognise</a:t>
+              <a:t>apologise</a:t>
             </a:r>
             <a:endParaRPr lang="en-US" sz="1200" dirty="0"/>
           </a:p>
@@ -41796,7 +41382,7 @@
                 <a:ea typeface="Calibri" pitchFamily="34" charset="-122"/>
                 <a:cs typeface="Calibri" pitchFamily="34" charset="-120"/>
               </a:rPr>
-              <a:t>To make someone feel very frightened by threatening or hurting them.</a:t>
+              <a:t>To give a short version of something, covering only the main points.</a:t>
             </a:r>
             <a:endParaRPr lang="en-US" sz="1200" dirty="0"/>
           </a:p>
@@ -41869,7 +41455,7 @@
                 <a:ea typeface="Trebuchet MS" pitchFamily="34" charset="-122"/>
                 <a:cs typeface="Trebuchet MS" pitchFamily="34" charset="-120"/>
               </a:rPr>
-              <a:t>terrorise</a:t>
+              <a:t>summarise</a:t>
             </a:r>
             <a:endParaRPr lang="en-US" sz="1200" dirty="0"/>
           </a:p>
@@ -41935,7 +41521,7 @@
                 <a:ea typeface="Calibri" pitchFamily="34" charset="-122"/>
                 <a:cs typeface="Calibri" pitchFamily="34" charset="-120"/>
               </a:rPr>
-              <a:t>To tell people about something, like a product, to make them want to buy it.</a:t>
+              <a:t>To tell lots of people about something, like a product or event, to get their attention.</a:t>
             </a:r>
             <a:endParaRPr lang="en-US" sz="1200" dirty="0"/>
           </a:p>
@@ -42074,7 +41660,7 @@
                 <a:ea typeface="Calibri" pitchFamily="34" charset="-122"/>
                 <a:cs typeface="Calibri" pitchFamily="34" charset="-120"/>
               </a:rPr>
-              <a:t>To give a short version of the main points of something.</a:t>
+              <a:t>To understand or become aware of something.</a:t>
             </a:r>
             <a:endParaRPr lang="en-US" sz="1200" dirty="0"/>
           </a:p>
@@ -42147,7 +41733,7 @@
                 <a:ea typeface="Trebuchet MS" pitchFamily="34" charset="-122"/>
                 <a:cs typeface="Trebuchet MS" pitchFamily="34" charset="-120"/>
               </a:rPr>
-              <a:t>apologise</a:t>
+              <a:t>memorise</a:t>
             </a:r>
             <a:endParaRPr lang="en-US" sz="1200" dirty="0"/>
           </a:p>
@@ -42213,7 +41799,7 @@
                 <a:ea typeface="Calibri" pitchFamily="34" charset="-122"/>
                 <a:cs typeface="Calibri" pitchFamily="34" charset="-120"/>
               </a:rPr>
-              <a:t>To suddenly understand or become aware of something.</a:t>
+              <a:t>To know who someone is or what something is because you have seen it before.</a:t>
             </a:r>
             <a:endParaRPr lang="en-US" sz="1200" dirty="0"/>
           </a:p>
@@ -42708,7 +42294,7 @@
                 <a:ea typeface="Calibri" pitchFamily="34" charset="-122"/>
                 <a:cs typeface="Calibri" pitchFamily="34" charset="-120"/>
               </a:rPr>
-              <a:t>Can you organise your books into alphabetical order before the lesson begins?</a:t>
+              <a:t>Can you summarise what happened in the story using just three sentences?</a:t>
             </a:r>
             <a:endParaRPr lang="en-US" sz="1500" dirty="0"/>
           </a:p>
@@ -42872,7 +42458,7 @@
                 <a:ea typeface="Calibri" pitchFamily="34" charset="-122"/>
                 <a:cs typeface="Calibri" pitchFamily="34" charset="-120"/>
               </a:rPr>
-              <a:t>I did not realise that the excursion was on a Friday this term.</a:t>
+              <a:t>We need to organise our desks before the visitors arrive at school.</a:t>
             </a:r>
             <a:endParaRPr lang="en-US" sz="1500" dirty="0"/>
           </a:p>
@@ -43036,7 +42622,7 @@
                 <a:ea typeface="Calibri" pitchFamily="34" charset="-122"/>
                 <a:cs typeface="Calibri" pitchFamily="34" charset="-120"/>
               </a:rPr>
-              <a:t>Please summarise what happened in the story using just three sentences.</a:t>
+              <a:t>It is important to apologise when you have hurt someone's feelings.</a:t>
             </a:r>
             <a:endParaRPr lang="en-US" sz="1500" dirty="0"/>
           </a:p>
